--- a/make_presentation/templates/templates/flow/no_logo_4.pptx
+++ b/make_presentation/templates/templates/flow/no_logo_4.pptx
@@ -63,29 +63,17 @@
             <a:noAutofit/>
           </a:bodyPr>
           <a:p>
-            <a:r>
-              <a:rPr b="0" lang="en-US" sz="1800" spc="-1" strike="noStrike">
-                <a:solidFill>
-                  <a:srgbClr val="000000"/>
-                </a:solidFill>
-                <a:latin typeface="Calibri"/>
+            <a:pPr algn="ctr">
+              <a:buNone/>
+            </a:pPr>
+            <a:r>
+              <a:rPr b="0" lang="en-US" sz="4400" spc="-1" strike="noStrike">
+                <a:latin typeface="Arial"/>
               </a:rPr>
-              <a:t>Для перемещения страницы </a:t>
-            </a:r>
-            <a:r>
-              <a:rPr b="0" lang="en-US" sz="1800" spc="-1" strike="noStrike">
-                <a:solidFill>
-                  <a:srgbClr val="000000"/>
-                </a:solidFill>
-                <a:latin typeface="Calibri"/>
-              </a:rPr>
-              <a:t>щёлкните мышью</a:t>
-            </a:r>
-            <a:endParaRPr b="0" lang="en-US" sz="1800" spc="-1" strike="noStrike">
-              <a:solidFill>
-                <a:srgbClr val="000000"/>
-              </a:solidFill>
-              <a:latin typeface="Calibri"/>
+              <a:t>Click to move the slide</a:t>
+            </a:r>
+            <a:endParaRPr b="0" lang="en-US" sz="4400" spc="-1" strike="noStrike">
+              <a:latin typeface="Arial"/>
             </a:endParaRPr>
           </a:p>
         </p:txBody>
@@ -119,270 +107,12 @@
           </a:bodyPr>
           <a:p>
             <a:r>
-              <a:rPr b="0" lang="ru-RU" sz="2000" spc="-1" strike="noStrike">
+              <a:rPr b="0" lang="en-US" sz="2000" spc="-1" strike="noStrike">
                 <a:latin typeface="Arial"/>
               </a:rPr>
-              <a:t>Д</a:t>
-            </a:r>
-            <a:r>
-              <a:rPr b="0" lang="ru-RU" sz="2000" spc="-1" strike="noStrike">
-                <a:latin typeface="Arial"/>
-              </a:rPr>
-              <a:t>л</a:t>
-            </a:r>
-            <a:r>
-              <a:rPr b="0" lang="ru-RU" sz="2000" spc="-1" strike="noStrike">
-                <a:latin typeface="Arial"/>
-              </a:rPr>
-              <a:t>я</a:t>
-            </a:r>
-            <a:r>
-              <a:rPr b="0" lang="ru-RU" sz="2000" spc="-1" strike="noStrike">
-                <a:latin typeface="Arial"/>
-              </a:rPr>
-              <a:t> </a:t>
-            </a:r>
-            <a:r>
-              <a:rPr b="0" lang="ru-RU" sz="2000" spc="-1" strike="noStrike">
-                <a:latin typeface="Arial"/>
-              </a:rPr>
-              <a:t>п</a:t>
-            </a:r>
-            <a:r>
-              <a:rPr b="0" lang="ru-RU" sz="2000" spc="-1" strike="noStrike">
-                <a:latin typeface="Arial"/>
-              </a:rPr>
-              <a:t>р</a:t>
-            </a:r>
-            <a:r>
-              <a:rPr b="0" lang="ru-RU" sz="2000" spc="-1" strike="noStrike">
-                <a:latin typeface="Arial"/>
-              </a:rPr>
-              <a:t>а</a:t>
-            </a:r>
-            <a:r>
-              <a:rPr b="0" lang="ru-RU" sz="2000" spc="-1" strike="noStrike">
-                <a:latin typeface="Arial"/>
-              </a:rPr>
-              <a:t>в</a:t>
-            </a:r>
-            <a:r>
-              <a:rPr b="0" lang="ru-RU" sz="2000" spc="-1" strike="noStrike">
-                <a:latin typeface="Arial"/>
-              </a:rPr>
-              <a:t>к</a:t>
-            </a:r>
-            <a:r>
-              <a:rPr b="0" lang="ru-RU" sz="2000" spc="-1" strike="noStrike">
-                <a:latin typeface="Arial"/>
-              </a:rPr>
-              <a:t>и</a:t>
-            </a:r>
-            <a:r>
-              <a:rPr b="0" lang="ru-RU" sz="2000" spc="-1" strike="noStrike">
-                <a:latin typeface="Arial"/>
-              </a:rPr>
-              <a:t> </a:t>
-            </a:r>
-            <a:r>
-              <a:rPr b="0" lang="ru-RU" sz="2000" spc="-1" strike="noStrike">
-                <a:latin typeface="Arial"/>
-              </a:rPr>
-              <a:t>ф</a:t>
-            </a:r>
-            <a:r>
-              <a:rPr b="0" lang="ru-RU" sz="2000" spc="-1" strike="noStrike">
-                <a:latin typeface="Arial"/>
-              </a:rPr>
-              <a:t>о</a:t>
-            </a:r>
-            <a:r>
-              <a:rPr b="0" lang="ru-RU" sz="2000" spc="-1" strike="noStrike">
-                <a:latin typeface="Arial"/>
-              </a:rPr>
-              <a:t>р</a:t>
-            </a:r>
-            <a:r>
-              <a:rPr b="0" lang="ru-RU" sz="2000" spc="-1" strike="noStrike">
-                <a:latin typeface="Arial"/>
-              </a:rPr>
-              <a:t>м</a:t>
-            </a:r>
-            <a:r>
-              <a:rPr b="0" lang="ru-RU" sz="2000" spc="-1" strike="noStrike">
-                <a:latin typeface="Arial"/>
-              </a:rPr>
-              <a:t>а</a:t>
-            </a:r>
-            <a:r>
-              <a:rPr b="0" lang="ru-RU" sz="2000" spc="-1" strike="noStrike">
-                <a:latin typeface="Arial"/>
-              </a:rPr>
-              <a:t>т</a:t>
-            </a:r>
-            <a:r>
-              <a:rPr b="0" lang="ru-RU" sz="2000" spc="-1" strike="noStrike">
-                <a:latin typeface="Arial"/>
-              </a:rPr>
-              <a:t>а</a:t>
-            </a:r>
-            <a:r>
-              <a:rPr b="0" lang="ru-RU" sz="2000" spc="-1" strike="noStrike">
-                <a:latin typeface="Arial"/>
-              </a:rPr>
-              <a:t> </a:t>
-            </a:r>
-            <a:r>
-              <a:rPr b="0" lang="ru-RU" sz="2000" spc="-1" strike="noStrike">
-                <a:latin typeface="Arial"/>
-              </a:rPr>
-              <a:t>п</a:t>
-            </a:r>
-            <a:r>
-              <a:rPr b="0" lang="ru-RU" sz="2000" spc="-1" strike="noStrike">
-                <a:latin typeface="Arial"/>
-              </a:rPr>
-              <a:t>р</a:t>
-            </a:r>
-            <a:r>
-              <a:rPr b="0" lang="ru-RU" sz="2000" spc="-1" strike="noStrike">
-                <a:latin typeface="Arial"/>
-              </a:rPr>
-              <a:t>и</a:t>
-            </a:r>
-            <a:r>
-              <a:rPr b="0" lang="ru-RU" sz="2000" spc="-1" strike="noStrike">
-                <a:latin typeface="Arial"/>
-              </a:rPr>
-              <a:t>м</a:t>
-            </a:r>
-            <a:r>
-              <a:rPr b="0" lang="ru-RU" sz="2000" spc="-1" strike="noStrike">
-                <a:latin typeface="Arial"/>
-              </a:rPr>
-              <a:t>е</a:t>
-            </a:r>
-            <a:r>
-              <a:rPr b="0" lang="ru-RU" sz="2000" spc="-1" strike="noStrike">
-                <a:latin typeface="Arial"/>
-              </a:rPr>
-              <a:t>ч</a:t>
-            </a:r>
-            <a:r>
-              <a:rPr b="0" lang="ru-RU" sz="2000" spc="-1" strike="noStrike">
-                <a:latin typeface="Arial"/>
-              </a:rPr>
-              <a:t>а</a:t>
-            </a:r>
-            <a:r>
-              <a:rPr b="0" lang="ru-RU" sz="2000" spc="-1" strike="noStrike">
-                <a:latin typeface="Arial"/>
-              </a:rPr>
-              <a:t>н</a:t>
-            </a:r>
-            <a:r>
-              <a:rPr b="0" lang="ru-RU" sz="2000" spc="-1" strike="noStrike">
-                <a:latin typeface="Arial"/>
-              </a:rPr>
-              <a:t>и</a:t>
-            </a:r>
-            <a:r>
-              <a:rPr b="0" lang="ru-RU" sz="2000" spc="-1" strike="noStrike">
-                <a:latin typeface="Arial"/>
-              </a:rPr>
-              <a:t>й</a:t>
-            </a:r>
-            <a:r>
-              <a:rPr b="0" lang="ru-RU" sz="2000" spc="-1" strike="noStrike">
-                <a:latin typeface="Arial"/>
-              </a:rPr>
-              <a:t> </a:t>
-            </a:r>
-            <a:r>
-              <a:rPr b="0" lang="ru-RU" sz="2000" spc="-1" strike="noStrike">
-                <a:latin typeface="Arial"/>
-              </a:rPr>
-              <a:t>щ</a:t>
-            </a:r>
-            <a:r>
-              <a:rPr b="0" lang="ru-RU" sz="2000" spc="-1" strike="noStrike">
-                <a:latin typeface="Arial"/>
-              </a:rPr>
-              <a:t>ё</a:t>
-            </a:r>
-            <a:r>
-              <a:rPr b="0" lang="ru-RU" sz="2000" spc="-1" strike="noStrike">
-                <a:latin typeface="Arial"/>
-              </a:rPr>
-              <a:t>л</a:t>
-            </a:r>
-            <a:r>
-              <a:rPr b="0" lang="ru-RU" sz="2000" spc="-1" strike="noStrike">
-                <a:latin typeface="Arial"/>
-              </a:rPr>
-              <a:t>к</a:t>
-            </a:r>
-            <a:r>
-              <a:rPr b="0" lang="ru-RU" sz="2000" spc="-1" strike="noStrike">
-                <a:latin typeface="Arial"/>
-              </a:rPr>
-              <a:t>н</a:t>
-            </a:r>
-            <a:r>
-              <a:rPr b="0" lang="ru-RU" sz="2000" spc="-1" strike="noStrike">
-                <a:latin typeface="Arial"/>
-              </a:rPr>
-              <a:t>и</a:t>
-            </a:r>
-            <a:r>
-              <a:rPr b="0" lang="ru-RU" sz="2000" spc="-1" strike="noStrike">
-                <a:latin typeface="Arial"/>
-              </a:rPr>
-              <a:t>т</a:t>
-            </a:r>
-            <a:r>
-              <a:rPr b="0" lang="ru-RU" sz="2000" spc="-1" strike="noStrike">
-                <a:latin typeface="Arial"/>
-              </a:rPr>
-              <a:t>е</a:t>
-            </a:r>
-            <a:r>
-              <a:rPr b="0" lang="ru-RU" sz="2000" spc="-1" strike="noStrike">
-                <a:latin typeface="Arial"/>
-              </a:rPr>
-              <a:t> </a:t>
-            </a:r>
-            <a:r>
-              <a:rPr b="0" lang="ru-RU" sz="2000" spc="-1" strike="noStrike">
-                <a:latin typeface="Arial"/>
-              </a:rPr>
-              <a:t>м</a:t>
-            </a:r>
-            <a:r>
-              <a:rPr b="0" lang="ru-RU" sz="2000" spc="-1" strike="noStrike">
-                <a:latin typeface="Arial"/>
-              </a:rPr>
-              <a:t>ы</a:t>
-            </a:r>
-            <a:r>
-              <a:rPr b="0" lang="ru-RU" sz="2000" spc="-1" strike="noStrike">
-                <a:latin typeface="Arial"/>
-              </a:rPr>
-              <a:t>ш</a:t>
-            </a:r>
-            <a:r>
-              <a:rPr b="0" lang="ru-RU" sz="2000" spc="-1" strike="noStrike">
-                <a:latin typeface="Arial"/>
-              </a:rPr>
-              <a:t>ь</a:t>
-            </a:r>
-            <a:r>
-              <a:rPr b="0" lang="ru-RU" sz="2000" spc="-1" strike="noStrike">
-                <a:latin typeface="Arial"/>
-              </a:rPr>
-              <a:t>ю</a:t>
-            </a:r>
-            <a:endParaRPr b="0" lang="ru-RU" sz="2000" spc="-1" strike="noStrike">
+              <a:t>Click to edit the notes format</a:t>
+            </a:r>
+            <a:endParaRPr b="0" lang="en-US" sz="2000" spc="-1" strike="noStrike">
               <a:latin typeface="Arial"/>
             </a:endParaRPr>
           </a:p>
@@ -417,12 +147,12 @@
           </a:bodyPr>
           <a:p>
             <a:r>
-              <a:rPr b="0" lang="ru-RU" sz="1400" spc="-1" strike="noStrike">
+              <a:rPr b="0" lang="en-US" sz="1400" spc="-1" strike="noStrike">
                 <a:latin typeface="Times New Roman"/>
               </a:rPr>
-              <a:t>&lt;верхний колонтитул&gt;</a:t>
-            </a:r>
-            <a:endParaRPr b="0" lang="ru-RU" sz="1400" spc="-1" strike="noStrike">
+              <a:t>&lt;header&gt;</a:t>
+            </a:r>
+            <a:endParaRPr b="0" lang="en-US" sz="1400" spc="-1" strike="noStrike">
               <a:latin typeface="Times New Roman"/>
             </a:endParaRPr>
           </a:p>
@@ -458,7 +188,7 @@
           <a:lstStyle>
             <a:lvl1pPr algn="r">
               <a:buNone/>
-              <a:defRPr b="0" lang="ru-RU" sz="1400" spc="-1" strike="noStrike">
+              <a:defRPr b="0" lang="en-US" sz="1400" spc="-1" strike="noStrike">
                 <a:latin typeface="Times New Roman"/>
               </a:defRPr>
             </a:lvl1pPr>
@@ -468,12 +198,12 @@
               <a:buNone/>
             </a:pPr>
             <a:r>
-              <a:rPr b="0" lang="ru-RU" sz="1400" spc="-1" strike="noStrike">
+              <a:rPr b="0" lang="en-US" sz="1400" spc="-1" strike="noStrike">
                 <a:latin typeface="Times New Roman"/>
               </a:rPr>
-              <a:t>&lt;дата/время&gt;</a:t>
-            </a:r>
-            <a:endParaRPr b="0" lang="ru-RU" sz="1400" spc="-1" strike="noStrike">
+              <a:t>&lt;date/time&gt;</a:t>
+            </a:r>
+            <a:endParaRPr b="0" lang="en-US" sz="1400" spc="-1" strike="noStrike">
               <a:latin typeface="Times New Roman"/>
             </a:endParaRPr>
           </a:p>
@@ -508,19 +238,19 @@
           </a:bodyPr>
           <a:lstStyle>
             <a:lvl1pPr>
-              <a:defRPr b="0" lang="ru-RU" sz="1400" spc="-1" strike="noStrike">
+              <a:defRPr b="0" lang="en-US" sz="1400" spc="-1" strike="noStrike">
                 <a:latin typeface="Times New Roman"/>
               </a:defRPr>
             </a:lvl1pPr>
           </a:lstStyle>
           <a:p>
             <a:r>
-              <a:rPr b="0" lang="ru-RU" sz="1400" spc="-1" strike="noStrike">
+              <a:rPr b="0" lang="en-US" sz="1400" spc="-1" strike="noStrike">
                 <a:latin typeface="Times New Roman"/>
               </a:rPr>
-              <a:t>&lt;нижний колонтитул&gt;</a:t>
-            </a:r>
-            <a:endParaRPr b="0" lang="ru-RU" sz="1400" spc="-1" strike="noStrike">
+              <a:t>&lt;footer&gt;</a:t>
+            </a:r>
+            <a:endParaRPr b="0" lang="en-US" sz="1400" spc="-1" strike="noStrike">
               <a:latin typeface="Times New Roman"/>
             </a:endParaRPr>
           </a:p>
@@ -556,7 +286,7 @@
           <a:lstStyle>
             <a:lvl1pPr algn="r">
               <a:buNone/>
-              <a:defRPr b="0" lang="ru-RU" sz="1400" spc="-1" strike="noStrike">
+              <a:defRPr b="0" lang="en-US" sz="1400" spc="-1" strike="noStrike">
                 <a:latin typeface="Times New Roman"/>
               </a:defRPr>
             </a:lvl1pPr>
@@ -565,13 +295,13 @@
             <a:pPr algn="r">
               <a:buNone/>
             </a:pPr>
-            <a:fld id="{FCAD5B07-B879-45E8-9F88-96527CCA1B38}" type="slidenum">
-              <a:rPr b="0" lang="ru-RU" sz="1400" spc="-1" strike="noStrike">
+            <a:fld id="{BCC7EB5E-3279-4E32-9CC0-2CE4E5C172A4}" type="slidenum">
+              <a:rPr b="0" lang="en-US" sz="1400" spc="-1" strike="noStrike">
                 <a:latin typeface="Times New Roman"/>
               </a:rPr>
-              <a:t>&lt;номер&gt;</a:t>
+              <a:t>&lt;number&gt;</a:t>
             </a:fld>
-            <a:endParaRPr b="0" lang="ru-RU" sz="1400" spc="-1" strike="noStrike">
+            <a:endParaRPr b="0" lang="en-US" sz="1400" spc="-1" strike="noStrike">
               <a:latin typeface="Times New Roman"/>
             </a:endParaRPr>
           </a:p>
@@ -602,7 +332,7 @@
       </p:grpSpPr>
       <p:sp>
         <p:nvSpPr>
-          <p:cNvPr id="72" name="PlaceHolder 1"/>
+          <p:cNvPr id="71" name="PlaceHolder 1"/>
           <p:cNvSpPr>
             <a:spLocks noGrp="1"/>
           </p:cNvSpPr>
@@ -613,19 +343,19 @@
         <p:spPr>
           <a:xfrm>
             <a:off x="685800" y="1143000"/>
-            <a:ext cx="5486040" cy="3085920"/>
-          </a:xfrm>
-          <a:prstGeom prst="rect">
-            <a:avLst/>
-          </a:prstGeom>
-          <a:ln w="0">
-            <a:noFill/>
-          </a:ln>
-        </p:spPr>
-      </p:sp>
-      <p:sp>
-        <p:nvSpPr>
-          <p:cNvPr id="73" name="PlaceHolder 2"/>
+            <a:ext cx="5485680" cy="3085560"/>
+          </a:xfrm>
+          <a:prstGeom prst="rect">
+            <a:avLst/>
+          </a:prstGeom>
+          <a:ln w="0">
+            <a:noFill/>
+          </a:ln>
+        </p:spPr>
+      </p:sp>
+      <p:sp>
+        <p:nvSpPr>
+          <p:cNvPr id="72" name="PlaceHolder 2"/>
           <p:cNvSpPr>
             <a:spLocks noGrp="1"/>
           </p:cNvSpPr>
@@ -636,30 +366,30 @@
         <p:spPr>
           <a:xfrm>
             <a:off x="685800" y="4400640"/>
-            <a:ext cx="5486040" cy="3600000"/>
-          </a:xfrm>
-          <a:prstGeom prst="rect">
-            <a:avLst/>
-          </a:prstGeom>
-          <a:noFill/>
-          <a:ln w="0">
-            <a:noFill/>
-          </a:ln>
-        </p:spPr>
-        <p:txBody>
-          <a:bodyPr anchor="t">
+            <a:ext cx="5485680" cy="3599640"/>
+          </a:xfrm>
+          <a:prstGeom prst="rect">
+            <a:avLst/>
+          </a:prstGeom>
+          <a:noFill/>
+          <a:ln w="0">
+            <a:noFill/>
+          </a:ln>
+        </p:spPr>
+        <p:txBody>
+          <a:bodyPr lIns="0" rIns="0" tIns="0" bIns="0" anchor="t">
             <a:noAutofit/>
           </a:bodyPr>
           <a:p>
-            <a:endParaRPr b="0" lang="ru-RU" sz="2000" spc="-1" strike="noStrike">
-              <a:latin typeface="Arial"/>
-            </a:endParaRPr>
-          </a:p>
-        </p:txBody>
-      </p:sp>
-      <p:sp>
-        <p:nvSpPr>
-          <p:cNvPr id="74" name="PlaceHolder 3"/>
+            <a:endParaRPr b="0" lang="en-US" sz="2000" spc="-1" strike="noStrike">
+              <a:latin typeface="Arial"/>
+            </a:endParaRPr>
+          </a:p>
+        </p:txBody>
+      </p:sp>
+      <p:sp>
+        <p:nvSpPr>
+          <p:cNvPr id="73" name="PlaceHolder 3"/>
           <p:cNvSpPr>
             <a:spLocks noGrp="1"/>
           </p:cNvSpPr>
@@ -670,18 +400,18 @@
         <p:spPr>
           <a:xfrm>
             <a:off x="3884760" y="8685360"/>
-            <a:ext cx="2971440" cy="458280"/>
-          </a:xfrm>
-          <a:prstGeom prst="rect">
-            <a:avLst/>
-          </a:prstGeom>
-          <a:noFill/>
-          <a:ln w="0">
-            <a:noFill/>
-          </a:ln>
-        </p:spPr>
-        <p:txBody>
-          <a:bodyPr anchor="b">
+            <a:ext cx="2971080" cy="457920"/>
+          </a:xfrm>
+          <a:prstGeom prst="rect">
+            <a:avLst/>
+          </a:prstGeom>
+          <a:noFill/>
+          <a:ln w="0">
+            <a:noFill/>
+          </a:ln>
+        </p:spPr>
+        <p:txBody>
+          <a:bodyPr lIns="0" rIns="0" tIns="0" bIns="0" anchor="b">
             <a:noAutofit/>
           </a:bodyPr>
           <a:lstStyle>
@@ -702,13 +432,13 @@
               </a:lnSpc>
               <a:buNone/>
             </a:pPr>
-            <a:fld id="{D2034BE3-5A26-4778-8BC7-E1B031ECCB0C}" type="slidenum">
+            <a:fld id="{48F7ED69-9D27-41F5-9144-58458F3067D1}" type="slidenum">
               <a:rPr b="0" lang="ru-RU" sz="1200" spc="-1" strike="noStrike">
                 <a:latin typeface="Times New Roman"/>
               </a:rPr>
-              <a:t>&lt;номер&gt;</a:t>
+              <a:t>&lt;number&gt;</a:t>
             </a:fld>
-            <a:endParaRPr b="0" lang="ru-RU" sz="1200" spc="-1" strike="noStrike">
+            <a:endParaRPr b="0" lang="en-US" sz="1200" spc="-1" strike="noStrike">
               <a:latin typeface="Times New Roman"/>
             </a:endParaRPr>
           </a:p>
@@ -743,7 +473,7 @@
             <a:spLocks noGrp="1"/>
           </p:cNvSpPr>
           <p:nvPr>
-            <p:ph type="ftr" idx="2"/>
+            <p:ph type="ftr" idx="1"/>
           </p:nvPr>
         </p:nvSpPr>
         <p:spPr/>
@@ -763,14 +493,14 @@
             <a:spLocks noGrp="1"/>
           </p:cNvSpPr>
           <p:nvPr>
-            <p:ph type="sldNum" idx="3"/>
+            <p:ph type="sldNum" idx="2"/>
           </p:nvPr>
         </p:nvSpPr>
         <p:spPr/>
         <p:txBody>
           <a:bodyPr/>
           <a:p>
-            <a:fld id="{DE53457B-1F59-40BC-8D05-898F184BC70D}" type="slidenum">
+            <a:fld id="{C9662C37-E18D-4288-A302-B50E0C121983}" type="slidenum">
               <a:t>&lt;#&gt;</a:t>
             </a:fld>
           </a:p>
@@ -783,7 +513,7 @@
             <a:spLocks noGrp="1"/>
           </p:cNvSpPr>
           <p:nvPr>
-            <p:ph type="dt" idx="1"/>
+            <p:ph type="dt" idx="3"/>
           </p:nvPr>
         </p:nvSpPr>
         <p:spPr/>
@@ -791,7 +521,7 @@
           <a:bodyPr/>
           <a:p>
             <a:r>
-              <a:rPr lang="ru-RU"/>
+              <a:rPr lang="en-US"/>
               <a:t/>
             </a:r>
           </a:p>
@@ -832,7 +562,7 @@
         <p:spPr>
           <a:xfrm>
             <a:off x="1143000" y="841680"/>
-            <a:ext cx="6857640" cy="1790280"/>
+            <a:ext cx="6857280" cy="1789920"/>
           </a:xfrm>
           <a:prstGeom prst="rect">
             <a:avLst/>
@@ -847,11 +577,11 @@
             <a:noAutofit/>
           </a:bodyPr>
           <a:p>
-            <a:endParaRPr b="0" lang="en-US" sz="1800" spc="-1" strike="noStrike">
-              <a:solidFill>
-                <a:srgbClr val="000000"/>
-              </a:solidFill>
-              <a:latin typeface="Calibri"/>
+            <a:pPr algn="ctr">
+              <a:buNone/>
+            </a:pPr>
+            <a:endParaRPr b="0" lang="en-US" sz="4400" spc="-1" strike="noStrike">
+              <a:latin typeface="Arial"/>
             </a:endParaRPr>
           </a:p>
         </p:txBody>
@@ -884,20 +614,8 @@
             <a:normAutofit/>
           </a:bodyPr>
           <a:p>
-            <a:pPr>
-              <a:lnSpc>
-                <a:spcPct val="90000"/>
-              </a:lnSpc>
-              <a:spcBef>
-                <a:spcPts val="1417"/>
-              </a:spcBef>
-              <a:buNone/>
-            </a:pPr>
-            <a:endParaRPr b="0" lang="en-US" sz="2100" spc="-1" strike="noStrike">
-              <a:solidFill>
-                <a:srgbClr val="000000"/>
-              </a:solidFill>
-              <a:latin typeface="Calibri"/>
+            <a:endParaRPr b="0" lang="en-US" sz="3200" spc="-1" strike="noStrike">
+              <a:latin typeface="Arial"/>
             </a:endParaRPr>
           </a:p>
         </p:txBody>
@@ -930,20 +648,8 @@
             <a:normAutofit/>
           </a:bodyPr>
           <a:p>
-            <a:pPr>
-              <a:lnSpc>
-                <a:spcPct val="90000"/>
-              </a:lnSpc>
-              <a:spcBef>
-                <a:spcPts val="1417"/>
-              </a:spcBef>
-              <a:buNone/>
-            </a:pPr>
-            <a:endParaRPr b="0" lang="en-US" sz="2100" spc="-1" strike="noStrike">
-              <a:solidFill>
-                <a:srgbClr val="000000"/>
-              </a:solidFill>
-              <a:latin typeface="Calibri"/>
+            <a:endParaRPr b="0" lang="en-US" sz="3200" spc="-1" strike="noStrike">
+              <a:latin typeface="Arial"/>
             </a:endParaRPr>
           </a:p>
         </p:txBody>
@@ -955,7 +661,7 @@
             <a:spLocks noGrp="1"/>
           </p:cNvSpPr>
           <p:nvPr>
-            <p:ph type="ftr" idx="2"/>
+            <p:ph type="ftr" idx="1"/>
           </p:nvPr>
         </p:nvSpPr>
         <p:spPr/>
@@ -975,14 +681,14 @@
             <a:spLocks noGrp="1"/>
           </p:cNvSpPr>
           <p:nvPr>
-            <p:ph type="sldNum" idx="3"/>
+            <p:ph type="sldNum" idx="2"/>
           </p:nvPr>
         </p:nvSpPr>
         <p:spPr/>
         <p:txBody>
           <a:bodyPr/>
           <a:p>
-            <a:fld id="{0E50179D-9C92-4F6A-B9CC-36577BD4A600}" type="slidenum">
+            <a:fld id="{28067895-686D-4614-B0D5-6269CC60805E}" type="slidenum">
               <a:t>&lt;#&gt;</a:t>
             </a:fld>
           </a:p>
@@ -995,7 +701,7 @@
             <a:spLocks noGrp="1"/>
           </p:cNvSpPr>
           <p:nvPr>
-            <p:ph type="dt" idx="1"/>
+            <p:ph type="dt" idx="3"/>
           </p:nvPr>
         </p:nvSpPr>
         <p:spPr/>
@@ -1003,7 +709,7 @@
           <a:bodyPr/>
           <a:p>
             <a:r>
-              <a:rPr lang="ru-RU"/>
+              <a:rPr lang="en-US"/>
               <a:t/>
             </a:r>
           </a:p>
@@ -1044,7 +750,7 @@
         <p:spPr>
           <a:xfrm>
             <a:off x="1143000" y="841680"/>
-            <a:ext cx="6857640" cy="1790280"/>
+            <a:ext cx="6857280" cy="1789920"/>
           </a:xfrm>
           <a:prstGeom prst="rect">
             <a:avLst/>
@@ -1059,11 +765,11 @@
             <a:noAutofit/>
           </a:bodyPr>
           <a:p>
-            <a:endParaRPr b="0" lang="en-US" sz="1800" spc="-1" strike="noStrike">
-              <a:solidFill>
-                <a:srgbClr val="000000"/>
-              </a:solidFill>
-              <a:latin typeface="Calibri"/>
+            <a:pPr algn="ctr">
+              <a:buNone/>
+            </a:pPr>
+            <a:endParaRPr b="0" lang="en-US" sz="4400" spc="-1" strike="noStrike">
+              <a:latin typeface="Arial"/>
             </a:endParaRPr>
           </a:p>
         </p:txBody>
@@ -1096,20 +802,8 @@
             <a:normAutofit/>
           </a:bodyPr>
           <a:p>
-            <a:pPr>
-              <a:lnSpc>
-                <a:spcPct val="90000"/>
-              </a:lnSpc>
-              <a:spcBef>
-                <a:spcPts val="1417"/>
-              </a:spcBef>
-              <a:buNone/>
-            </a:pPr>
-            <a:endParaRPr b="0" lang="en-US" sz="2100" spc="-1" strike="noStrike">
-              <a:solidFill>
-                <a:srgbClr val="000000"/>
-              </a:solidFill>
-              <a:latin typeface="Calibri"/>
+            <a:endParaRPr b="0" lang="en-US" sz="3200" spc="-1" strike="noStrike">
+              <a:latin typeface="Arial"/>
             </a:endParaRPr>
           </a:p>
         </p:txBody>
@@ -1142,20 +836,8 @@
             <a:normAutofit/>
           </a:bodyPr>
           <a:p>
-            <a:pPr>
-              <a:lnSpc>
-                <a:spcPct val="90000"/>
-              </a:lnSpc>
-              <a:spcBef>
-                <a:spcPts val="1417"/>
-              </a:spcBef>
-              <a:buNone/>
-            </a:pPr>
-            <a:endParaRPr b="0" lang="en-US" sz="2100" spc="-1" strike="noStrike">
-              <a:solidFill>
-                <a:srgbClr val="000000"/>
-              </a:solidFill>
-              <a:latin typeface="Calibri"/>
+            <a:endParaRPr b="0" lang="en-US" sz="3200" spc="-1" strike="noStrike">
+              <a:latin typeface="Arial"/>
             </a:endParaRPr>
           </a:p>
         </p:txBody>
@@ -1188,20 +870,8 @@
             <a:normAutofit/>
           </a:bodyPr>
           <a:p>
-            <a:pPr>
-              <a:lnSpc>
-                <a:spcPct val="90000"/>
-              </a:lnSpc>
-              <a:spcBef>
-                <a:spcPts val="1417"/>
-              </a:spcBef>
-              <a:buNone/>
-            </a:pPr>
-            <a:endParaRPr b="0" lang="en-US" sz="2100" spc="-1" strike="noStrike">
-              <a:solidFill>
-                <a:srgbClr val="000000"/>
-              </a:solidFill>
-              <a:latin typeface="Calibri"/>
+            <a:endParaRPr b="0" lang="en-US" sz="3200" spc="-1" strike="noStrike">
+              <a:latin typeface="Arial"/>
             </a:endParaRPr>
           </a:p>
         </p:txBody>
@@ -1234,20 +904,8 @@
             <a:normAutofit/>
           </a:bodyPr>
           <a:p>
-            <a:pPr>
-              <a:lnSpc>
-                <a:spcPct val="90000"/>
-              </a:lnSpc>
-              <a:spcBef>
-                <a:spcPts val="1417"/>
-              </a:spcBef>
-              <a:buNone/>
-            </a:pPr>
-            <a:endParaRPr b="0" lang="en-US" sz="2100" spc="-1" strike="noStrike">
-              <a:solidFill>
-                <a:srgbClr val="000000"/>
-              </a:solidFill>
-              <a:latin typeface="Calibri"/>
+            <a:endParaRPr b="0" lang="en-US" sz="3200" spc="-1" strike="noStrike">
+              <a:latin typeface="Arial"/>
             </a:endParaRPr>
           </a:p>
         </p:txBody>
@@ -1259,7 +917,7 @@
             <a:spLocks noGrp="1"/>
           </p:cNvSpPr>
           <p:nvPr>
-            <p:ph type="ftr" idx="2"/>
+            <p:ph type="ftr" idx="1"/>
           </p:nvPr>
         </p:nvSpPr>
         <p:spPr/>
@@ -1279,14 +937,14 @@
             <a:spLocks noGrp="1"/>
           </p:cNvSpPr>
           <p:nvPr>
-            <p:ph type="sldNum" idx="3"/>
+            <p:ph type="sldNum" idx="2"/>
           </p:nvPr>
         </p:nvSpPr>
         <p:spPr/>
         <p:txBody>
           <a:bodyPr/>
           <a:p>
-            <a:fld id="{33FBB58C-C78F-4D6B-8DD2-72AAD5EF7632}" type="slidenum">
+            <a:fld id="{CCECA81F-6D84-49EA-8E6C-425CF4D14BBA}" type="slidenum">
               <a:t>&lt;#&gt;</a:t>
             </a:fld>
           </a:p>
@@ -1299,7 +957,7 @@
             <a:spLocks noGrp="1"/>
           </p:cNvSpPr>
           <p:nvPr>
-            <p:ph type="dt" idx="1"/>
+            <p:ph type="dt" idx="3"/>
           </p:nvPr>
         </p:nvSpPr>
         <p:spPr/>
@@ -1307,7 +965,7 @@
           <a:bodyPr/>
           <a:p>
             <a:r>
-              <a:rPr lang="ru-RU"/>
+              <a:rPr lang="en-US"/>
               <a:t/>
             </a:r>
           </a:p>
@@ -1348,7 +1006,7 @@
         <p:spPr>
           <a:xfrm>
             <a:off x="1143000" y="841680"/>
-            <a:ext cx="6857640" cy="1790280"/>
+            <a:ext cx="6857280" cy="1789920"/>
           </a:xfrm>
           <a:prstGeom prst="rect">
             <a:avLst/>
@@ -1363,11 +1021,11 @@
             <a:noAutofit/>
           </a:bodyPr>
           <a:p>
-            <a:endParaRPr b="0" lang="en-US" sz="1800" spc="-1" strike="noStrike">
-              <a:solidFill>
-                <a:srgbClr val="000000"/>
-              </a:solidFill>
-              <a:latin typeface="Calibri"/>
+            <a:pPr algn="ctr">
+              <a:buNone/>
+            </a:pPr>
+            <a:endParaRPr b="0" lang="en-US" sz="4400" spc="-1" strike="noStrike">
+              <a:latin typeface="Arial"/>
             </a:endParaRPr>
           </a:p>
         </p:txBody>
@@ -1400,20 +1058,8 @@
             <a:normAutofit/>
           </a:bodyPr>
           <a:p>
-            <a:pPr>
-              <a:lnSpc>
-                <a:spcPct val="90000"/>
-              </a:lnSpc>
-              <a:spcBef>
-                <a:spcPts val="1417"/>
-              </a:spcBef>
-              <a:buNone/>
-            </a:pPr>
-            <a:endParaRPr b="0" lang="en-US" sz="2100" spc="-1" strike="noStrike">
-              <a:solidFill>
-                <a:srgbClr val="000000"/>
-              </a:solidFill>
-              <a:latin typeface="Calibri"/>
+            <a:endParaRPr b="0" lang="en-US" sz="3200" spc="-1" strike="noStrike">
+              <a:latin typeface="Arial"/>
             </a:endParaRPr>
           </a:p>
         </p:txBody>
@@ -1446,20 +1092,8 @@
             <a:normAutofit/>
           </a:bodyPr>
           <a:p>
-            <a:pPr>
-              <a:lnSpc>
-                <a:spcPct val="90000"/>
-              </a:lnSpc>
-              <a:spcBef>
-                <a:spcPts val="1417"/>
-              </a:spcBef>
-              <a:buNone/>
-            </a:pPr>
-            <a:endParaRPr b="0" lang="en-US" sz="2100" spc="-1" strike="noStrike">
-              <a:solidFill>
-                <a:srgbClr val="000000"/>
-              </a:solidFill>
-              <a:latin typeface="Calibri"/>
+            <a:endParaRPr b="0" lang="en-US" sz="3200" spc="-1" strike="noStrike">
+              <a:latin typeface="Arial"/>
             </a:endParaRPr>
           </a:p>
         </p:txBody>
@@ -1492,20 +1126,8 @@
             <a:normAutofit/>
           </a:bodyPr>
           <a:p>
-            <a:pPr>
-              <a:lnSpc>
-                <a:spcPct val="90000"/>
-              </a:lnSpc>
-              <a:spcBef>
-                <a:spcPts val="1417"/>
-              </a:spcBef>
-              <a:buNone/>
-            </a:pPr>
-            <a:endParaRPr b="0" lang="en-US" sz="2100" spc="-1" strike="noStrike">
-              <a:solidFill>
-                <a:srgbClr val="000000"/>
-              </a:solidFill>
-              <a:latin typeface="Calibri"/>
+            <a:endParaRPr b="0" lang="en-US" sz="3200" spc="-1" strike="noStrike">
+              <a:latin typeface="Arial"/>
             </a:endParaRPr>
           </a:p>
         </p:txBody>
@@ -1538,20 +1160,8 @@
             <a:normAutofit/>
           </a:bodyPr>
           <a:p>
-            <a:pPr>
-              <a:lnSpc>
-                <a:spcPct val="90000"/>
-              </a:lnSpc>
-              <a:spcBef>
-                <a:spcPts val="1417"/>
-              </a:spcBef>
-              <a:buNone/>
-            </a:pPr>
-            <a:endParaRPr b="0" lang="en-US" sz="2100" spc="-1" strike="noStrike">
-              <a:solidFill>
-                <a:srgbClr val="000000"/>
-              </a:solidFill>
-              <a:latin typeface="Calibri"/>
+            <a:endParaRPr b="0" lang="en-US" sz="3200" spc="-1" strike="noStrike">
+              <a:latin typeface="Arial"/>
             </a:endParaRPr>
           </a:p>
         </p:txBody>
@@ -1584,20 +1194,8 @@
             <a:normAutofit/>
           </a:bodyPr>
           <a:p>
-            <a:pPr>
-              <a:lnSpc>
-                <a:spcPct val="90000"/>
-              </a:lnSpc>
-              <a:spcBef>
-                <a:spcPts val="1417"/>
-              </a:spcBef>
-              <a:buNone/>
-            </a:pPr>
-            <a:endParaRPr b="0" lang="en-US" sz="2100" spc="-1" strike="noStrike">
-              <a:solidFill>
-                <a:srgbClr val="000000"/>
-              </a:solidFill>
-              <a:latin typeface="Calibri"/>
+            <a:endParaRPr b="0" lang="en-US" sz="3200" spc="-1" strike="noStrike">
+              <a:latin typeface="Arial"/>
             </a:endParaRPr>
           </a:p>
         </p:txBody>
@@ -1630,20 +1228,8 @@
             <a:normAutofit/>
           </a:bodyPr>
           <a:p>
-            <a:pPr>
-              <a:lnSpc>
-                <a:spcPct val="90000"/>
-              </a:lnSpc>
-              <a:spcBef>
-                <a:spcPts val="1417"/>
-              </a:spcBef>
-              <a:buNone/>
-            </a:pPr>
-            <a:endParaRPr b="0" lang="en-US" sz="2100" spc="-1" strike="noStrike">
-              <a:solidFill>
-                <a:srgbClr val="000000"/>
-              </a:solidFill>
-              <a:latin typeface="Calibri"/>
+            <a:endParaRPr b="0" lang="en-US" sz="3200" spc="-1" strike="noStrike">
+              <a:latin typeface="Arial"/>
             </a:endParaRPr>
           </a:p>
         </p:txBody>
@@ -1655,7 +1241,7 @@
             <a:spLocks noGrp="1"/>
           </p:cNvSpPr>
           <p:nvPr>
-            <p:ph type="ftr" idx="2"/>
+            <p:ph type="ftr" idx="1"/>
           </p:nvPr>
         </p:nvSpPr>
         <p:spPr/>
@@ -1675,14 +1261,14 @@
             <a:spLocks noGrp="1"/>
           </p:cNvSpPr>
           <p:nvPr>
-            <p:ph type="sldNum" idx="3"/>
+            <p:ph type="sldNum" idx="2"/>
           </p:nvPr>
         </p:nvSpPr>
         <p:spPr/>
         <p:txBody>
           <a:bodyPr/>
           <a:p>
-            <a:fld id="{2C704094-BA53-4460-920C-4A49973AFE14}" type="slidenum">
+            <a:fld id="{82EA2A4B-34B3-44DC-B91B-F225AEA3DFDB}" type="slidenum">
               <a:t>&lt;#&gt;</a:t>
             </a:fld>
           </a:p>
@@ -1695,7 +1281,7 @@
             <a:spLocks noGrp="1"/>
           </p:cNvSpPr>
           <p:nvPr>
-            <p:ph type="dt" idx="1"/>
+            <p:ph type="dt" idx="3"/>
           </p:nvPr>
         </p:nvSpPr>
         <p:spPr/>
@@ -1703,7 +1289,7 @@
           <a:bodyPr/>
           <a:p>
             <a:r>
-              <a:rPr lang="ru-RU"/>
+              <a:rPr lang="en-US"/>
               <a:t/>
             </a:r>
           </a:p>
@@ -1744,44 +1330,7 @@
         <p:spPr>
           <a:xfrm>
             <a:off x="1143000" y="841680"/>
-            <a:ext cx="6857640" cy="1790280"/>
-          </a:xfrm>
-          <a:prstGeom prst="rect">
-            <a:avLst/>
-          </a:prstGeom>
-          <a:noFill/>
-          <a:ln w="0">
-            <a:noFill/>
-          </a:ln>
-        </p:spPr>
-        <p:txBody>
-          <a:bodyPr lIns="0" rIns="0" tIns="0" bIns="0" anchor="ctr">
-            <a:noAutofit/>
-          </a:bodyPr>
-          <a:p>
-            <a:endParaRPr b="0" lang="en-US" sz="1800" spc="-1" strike="noStrike">
-              <a:solidFill>
-                <a:srgbClr val="000000"/>
-              </a:solidFill>
-              <a:latin typeface="Calibri"/>
-            </a:endParaRPr>
-          </a:p>
-        </p:txBody>
-      </p:sp>
-      <p:sp>
-        <p:nvSpPr>
-          <p:cNvPr id="6" name="PlaceHolder 2"/>
-          <p:cNvSpPr>
-            <a:spLocks noGrp="1"/>
-          </p:cNvSpPr>
-          <p:nvPr>
-            <p:ph type="subTitle"/>
-          </p:nvPr>
-        </p:nvSpPr>
-        <p:spPr>
-          <a:xfrm>
-            <a:off x="457200" y="1203480"/>
-            <a:ext cx="8229240" cy="2982960"/>
+            <a:ext cx="6857280" cy="1789920"/>
           </a:xfrm>
           <a:prstGeom prst="rect">
             <a:avLst/>
@@ -1799,7 +1348,44 @@
             <a:pPr algn="ctr">
               <a:buNone/>
             </a:pPr>
-            <a:endParaRPr b="0" lang="ru-RU" sz="3200" spc="-1" strike="noStrike">
+            <a:endParaRPr b="0" lang="en-US" sz="4400" spc="-1" strike="noStrike">
+              <a:latin typeface="Arial"/>
+            </a:endParaRPr>
+          </a:p>
+        </p:txBody>
+      </p:sp>
+      <p:sp>
+        <p:nvSpPr>
+          <p:cNvPr id="6" name="PlaceHolder 2"/>
+          <p:cNvSpPr>
+            <a:spLocks noGrp="1"/>
+          </p:cNvSpPr>
+          <p:nvPr>
+            <p:ph type="subTitle"/>
+          </p:nvPr>
+        </p:nvSpPr>
+        <p:spPr>
+          <a:xfrm>
+            <a:off x="457200" y="1203480"/>
+            <a:ext cx="8229240" cy="2982960"/>
+          </a:xfrm>
+          <a:prstGeom prst="rect">
+            <a:avLst/>
+          </a:prstGeom>
+          <a:noFill/>
+          <a:ln w="0">
+            <a:noFill/>
+          </a:ln>
+        </p:spPr>
+        <p:txBody>
+          <a:bodyPr lIns="0" rIns="0" tIns="0" bIns="0" anchor="ctr">
+            <a:noAutofit/>
+          </a:bodyPr>
+          <a:p>
+            <a:pPr algn="ctr">
+              <a:buNone/>
+            </a:pPr>
+            <a:endParaRPr b="0" lang="en-US" sz="3200" spc="-1" strike="noStrike">
               <a:latin typeface="Arial"/>
             </a:endParaRPr>
           </a:p>
@@ -1812,7 +1398,7 @@
             <a:spLocks noGrp="1"/>
           </p:cNvSpPr>
           <p:nvPr>
-            <p:ph type="ftr" idx="2"/>
+            <p:ph type="ftr" idx="1"/>
           </p:nvPr>
         </p:nvSpPr>
         <p:spPr/>
@@ -1832,14 +1418,14 @@
             <a:spLocks noGrp="1"/>
           </p:cNvSpPr>
           <p:nvPr>
-            <p:ph type="sldNum" idx="3"/>
+            <p:ph type="sldNum" idx="2"/>
           </p:nvPr>
         </p:nvSpPr>
         <p:spPr/>
         <p:txBody>
           <a:bodyPr/>
           <a:p>
-            <a:fld id="{6FEE1DFF-3FBC-4A8A-9334-BB852198CFB3}" type="slidenum">
+            <a:fld id="{4328C8D0-CC0A-4302-8502-6F509F65B5C6}" type="slidenum">
               <a:t>&lt;#&gt;</a:t>
             </a:fld>
           </a:p>
@@ -1852,7 +1438,7 @@
             <a:spLocks noGrp="1"/>
           </p:cNvSpPr>
           <p:nvPr>
-            <p:ph type="dt" idx="1"/>
+            <p:ph type="dt" idx="3"/>
           </p:nvPr>
         </p:nvSpPr>
         <p:spPr/>
@@ -1860,7 +1446,7 @@
           <a:bodyPr/>
           <a:p>
             <a:r>
-              <a:rPr lang="ru-RU"/>
+              <a:rPr lang="en-US"/>
               <a:t/>
             </a:r>
           </a:p>
@@ -1901,7 +1487,7 @@
         <p:spPr>
           <a:xfrm>
             <a:off x="1143000" y="841680"/>
-            <a:ext cx="6857640" cy="1790280"/>
+            <a:ext cx="6857280" cy="1789920"/>
           </a:xfrm>
           <a:prstGeom prst="rect">
             <a:avLst/>
@@ -1916,11 +1502,11 @@
             <a:noAutofit/>
           </a:bodyPr>
           <a:p>
-            <a:endParaRPr b="0" lang="en-US" sz="1800" spc="-1" strike="noStrike">
-              <a:solidFill>
-                <a:srgbClr val="000000"/>
-              </a:solidFill>
-              <a:latin typeface="Calibri"/>
+            <a:pPr algn="ctr">
+              <a:buNone/>
+            </a:pPr>
+            <a:endParaRPr b="0" lang="en-US" sz="4400" spc="-1" strike="noStrike">
+              <a:latin typeface="Arial"/>
             </a:endParaRPr>
           </a:p>
         </p:txBody>
@@ -1953,20 +1539,8 @@
             <a:normAutofit/>
           </a:bodyPr>
           <a:p>
-            <a:pPr>
-              <a:lnSpc>
-                <a:spcPct val="90000"/>
-              </a:lnSpc>
-              <a:spcBef>
-                <a:spcPts val="1417"/>
-              </a:spcBef>
-              <a:buNone/>
-            </a:pPr>
-            <a:endParaRPr b="0" lang="en-US" sz="2100" spc="-1" strike="noStrike">
-              <a:solidFill>
-                <a:srgbClr val="000000"/>
-              </a:solidFill>
-              <a:latin typeface="Calibri"/>
+            <a:endParaRPr b="0" lang="en-US" sz="3200" spc="-1" strike="noStrike">
+              <a:latin typeface="Arial"/>
             </a:endParaRPr>
           </a:p>
         </p:txBody>
@@ -1978,7 +1552,7 @@
             <a:spLocks noGrp="1"/>
           </p:cNvSpPr>
           <p:nvPr>
-            <p:ph type="ftr" idx="2"/>
+            <p:ph type="ftr" idx="1"/>
           </p:nvPr>
         </p:nvSpPr>
         <p:spPr/>
@@ -1998,14 +1572,14 @@
             <a:spLocks noGrp="1"/>
           </p:cNvSpPr>
           <p:nvPr>
-            <p:ph type="sldNum" idx="3"/>
+            <p:ph type="sldNum" idx="2"/>
           </p:nvPr>
         </p:nvSpPr>
         <p:spPr/>
         <p:txBody>
           <a:bodyPr/>
           <a:p>
-            <a:fld id="{9933941A-B5E6-45E2-8D81-46E22A73488E}" type="slidenum">
+            <a:fld id="{8D0B5382-2E57-4060-8993-2335FB1988A2}" type="slidenum">
               <a:t>&lt;#&gt;</a:t>
             </a:fld>
           </a:p>
@@ -2018,7 +1592,7 @@
             <a:spLocks noGrp="1"/>
           </p:cNvSpPr>
           <p:nvPr>
-            <p:ph type="dt" idx="1"/>
+            <p:ph type="dt" idx="3"/>
           </p:nvPr>
         </p:nvSpPr>
         <p:spPr/>
@@ -2026,7 +1600,7 @@
           <a:bodyPr/>
           <a:p>
             <a:r>
-              <a:rPr lang="ru-RU"/>
+              <a:rPr lang="en-US"/>
               <a:t/>
             </a:r>
           </a:p>
@@ -2067,7 +1641,7 @@
         <p:spPr>
           <a:xfrm>
             <a:off x="1143000" y="841680"/>
-            <a:ext cx="6857640" cy="1790280"/>
+            <a:ext cx="6857280" cy="1789920"/>
           </a:xfrm>
           <a:prstGeom prst="rect">
             <a:avLst/>
@@ -2082,11 +1656,11 @@
             <a:noAutofit/>
           </a:bodyPr>
           <a:p>
-            <a:endParaRPr b="0" lang="en-US" sz="1800" spc="-1" strike="noStrike">
-              <a:solidFill>
-                <a:srgbClr val="000000"/>
-              </a:solidFill>
-              <a:latin typeface="Calibri"/>
+            <a:pPr algn="ctr">
+              <a:buNone/>
+            </a:pPr>
+            <a:endParaRPr b="0" lang="en-US" sz="4400" spc="-1" strike="noStrike">
+              <a:latin typeface="Arial"/>
             </a:endParaRPr>
           </a:p>
         </p:txBody>
@@ -2119,20 +1693,8 @@
             <a:normAutofit/>
           </a:bodyPr>
           <a:p>
-            <a:pPr>
-              <a:lnSpc>
-                <a:spcPct val="90000"/>
-              </a:lnSpc>
-              <a:spcBef>
-                <a:spcPts val="1417"/>
-              </a:spcBef>
-              <a:buNone/>
-            </a:pPr>
-            <a:endParaRPr b="0" lang="en-US" sz="2100" spc="-1" strike="noStrike">
-              <a:solidFill>
-                <a:srgbClr val="000000"/>
-              </a:solidFill>
-              <a:latin typeface="Calibri"/>
+            <a:endParaRPr b="0" lang="en-US" sz="3200" spc="-1" strike="noStrike">
+              <a:latin typeface="Arial"/>
             </a:endParaRPr>
           </a:p>
         </p:txBody>
@@ -2165,20 +1727,8 @@
             <a:normAutofit/>
           </a:bodyPr>
           <a:p>
-            <a:pPr>
-              <a:lnSpc>
-                <a:spcPct val="90000"/>
-              </a:lnSpc>
-              <a:spcBef>
-                <a:spcPts val="1417"/>
-              </a:spcBef>
-              <a:buNone/>
-            </a:pPr>
-            <a:endParaRPr b="0" lang="en-US" sz="2100" spc="-1" strike="noStrike">
-              <a:solidFill>
-                <a:srgbClr val="000000"/>
-              </a:solidFill>
-              <a:latin typeface="Calibri"/>
+            <a:endParaRPr b="0" lang="en-US" sz="3200" spc="-1" strike="noStrike">
+              <a:latin typeface="Arial"/>
             </a:endParaRPr>
           </a:p>
         </p:txBody>
@@ -2190,7 +1740,7 @@
             <a:spLocks noGrp="1"/>
           </p:cNvSpPr>
           <p:nvPr>
-            <p:ph type="ftr" idx="2"/>
+            <p:ph type="ftr" idx="1"/>
           </p:nvPr>
         </p:nvSpPr>
         <p:spPr/>
@@ -2210,14 +1760,14 @@
             <a:spLocks noGrp="1"/>
           </p:cNvSpPr>
           <p:nvPr>
-            <p:ph type="sldNum" idx="3"/>
+            <p:ph type="sldNum" idx="2"/>
           </p:nvPr>
         </p:nvSpPr>
         <p:spPr/>
         <p:txBody>
           <a:bodyPr/>
           <a:p>
-            <a:fld id="{4011E17F-E589-4B10-8134-5469BAEDFD13}" type="slidenum">
+            <a:fld id="{A814A6A5-5222-44F8-A67D-E2EF013A3963}" type="slidenum">
               <a:t>&lt;#&gt;</a:t>
             </a:fld>
           </a:p>
@@ -2230,7 +1780,7 @@
             <a:spLocks noGrp="1"/>
           </p:cNvSpPr>
           <p:nvPr>
-            <p:ph type="dt" idx="1"/>
+            <p:ph type="dt" idx="3"/>
           </p:nvPr>
         </p:nvSpPr>
         <p:spPr/>
@@ -2238,7 +1788,7 @@
           <a:bodyPr/>
           <a:p>
             <a:r>
-              <a:rPr lang="ru-RU"/>
+              <a:rPr lang="en-US"/>
               <a:t/>
             </a:r>
           </a:p>
@@ -2279,7 +1829,7 @@
         <p:spPr>
           <a:xfrm>
             <a:off x="1143000" y="841680"/>
-            <a:ext cx="6857640" cy="1790280"/>
+            <a:ext cx="6857280" cy="1789920"/>
           </a:xfrm>
           <a:prstGeom prst="rect">
             <a:avLst/>
@@ -2294,11 +1844,11 @@
             <a:noAutofit/>
           </a:bodyPr>
           <a:p>
-            <a:endParaRPr b="0" lang="en-US" sz="1800" spc="-1" strike="noStrike">
-              <a:solidFill>
-                <a:srgbClr val="000000"/>
-              </a:solidFill>
-              <a:latin typeface="Calibri"/>
+            <a:pPr algn="ctr">
+              <a:buNone/>
+            </a:pPr>
+            <a:endParaRPr b="0" lang="en-US" sz="4400" spc="-1" strike="noStrike">
+              <a:latin typeface="Arial"/>
             </a:endParaRPr>
           </a:p>
         </p:txBody>
@@ -2310,7 +1860,7 @@
             <a:spLocks noGrp="1"/>
           </p:cNvSpPr>
           <p:nvPr>
-            <p:ph type="ftr" idx="2"/>
+            <p:ph type="ftr" idx="1"/>
           </p:nvPr>
         </p:nvSpPr>
         <p:spPr/>
@@ -2330,14 +1880,14 @@
             <a:spLocks noGrp="1"/>
           </p:cNvSpPr>
           <p:nvPr>
-            <p:ph type="sldNum" idx="3"/>
+            <p:ph type="sldNum" idx="2"/>
           </p:nvPr>
         </p:nvSpPr>
         <p:spPr/>
         <p:txBody>
           <a:bodyPr/>
           <a:p>
-            <a:fld id="{911C3F2C-7BF8-4A27-B8BD-1BF4D98D7B9A}" type="slidenum">
+            <a:fld id="{70D61971-FE62-4D01-B9C1-5395489A9CEF}" type="slidenum">
               <a:t>&lt;#&gt;</a:t>
             </a:fld>
           </a:p>
@@ -2350,7 +1900,7 @@
             <a:spLocks noGrp="1"/>
           </p:cNvSpPr>
           <p:nvPr>
-            <p:ph type="dt" idx="1"/>
+            <p:ph type="dt" idx="3"/>
           </p:nvPr>
         </p:nvSpPr>
         <p:spPr/>
@@ -2358,7 +1908,7 @@
           <a:bodyPr/>
           <a:p>
             <a:r>
-              <a:rPr lang="ru-RU"/>
+              <a:rPr lang="en-US"/>
               <a:t/>
             </a:r>
           </a:p>
@@ -2399,7 +1949,7 @@
         <p:spPr>
           <a:xfrm>
             <a:off x="1143000" y="841680"/>
-            <a:ext cx="6857640" cy="8299800"/>
+            <a:ext cx="6857280" cy="8298360"/>
           </a:xfrm>
           <a:prstGeom prst="rect">
             <a:avLst/>
@@ -2417,7 +1967,7 @@
             <a:pPr algn="ctr">
               <a:buNone/>
             </a:pPr>
-            <a:endParaRPr b="0" lang="ru-RU" sz="3200" spc="-1" strike="noStrike">
+            <a:endParaRPr b="0" lang="en-US" sz="3200" spc="-1" strike="noStrike">
               <a:latin typeface="Arial"/>
             </a:endParaRPr>
           </a:p>
@@ -2430,7 +1980,7 @@
             <a:spLocks noGrp="1"/>
           </p:cNvSpPr>
           <p:nvPr>
-            <p:ph type="ftr" idx="2"/>
+            <p:ph type="ftr" idx="1"/>
           </p:nvPr>
         </p:nvSpPr>
         <p:spPr/>
@@ -2450,14 +2000,14 @@
             <a:spLocks noGrp="1"/>
           </p:cNvSpPr>
           <p:nvPr>
-            <p:ph type="sldNum" idx="3"/>
+            <p:ph type="sldNum" idx="2"/>
           </p:nvPr>
         </p:nvSpPr>
         <p:spPr/>
         <p:txBody>
           <a:bodyPr/>
           <a:p>
-            <a:fld id="{B6BF2D78-1419-43BF-B7FB-9D676E8C2578}" type="slidenum">
+            <a:fld id="{17E5D810-1096-4190-A5DC-A7F40BBA7782}" type="slidenum">
               <a:t>&lt;#&gt;</a:t>
             </a:fld>
           </a:p>
@@ -2470,7 +2020,7 @@
             <a:spLocks noGrp="1"/>
           </p:cNvSpPr>
           <p:nvPr>
-            <p:ph type="dt" idx="1"/>
+            <p:ph type="dt" idx="3"/>
           </p:nvPr>
         </p:nvSpPr>
         <p:spPr/>
@@ -2478,7 +2028,7 @@
           <a:bodyPr/>
           <a:p>
             <a:r>
-              <a:rPr lang="ru-RU"/>
+              <a:rPr lang="en-US"/>
               <a:t/>
             </a:r>
           </a:p>
@@ -2519,7 +2069,7 @@
         <p:spPr>
           <a:xfrm>
             <a:off x="1143000" y="841680"/>
-            <a:ext cx="6857640" cy="1790280"/>
+            <a:ext cx="6857280" cy="1789920"/>
           </a:xfrm>
           <a:prstGeom prst="rect">
             <a:avLst/>
@@ -2534,11 +2084,11 @@
             <a:noAutofit/>
           </a:bodyPr>
           <a:p>
-            <a:endParaRPr b="0" lang="en-US" sz="1800" spc="-1" strike="noStrike">
-              <a:solidFill>
-                <a:srgbClr val="000000"/>
-              </a:solidFill>
-              <a:latin typeface="Calibri"/>
+            <a:pPr algn="ctr">
+              <a:buNone/>
+            </a:pPr>
+            <a:endParaRPr b="0" lang="en-US" sz="4400" spc="-1" strike="noStrike">
+              <a:latin typeface="Arial"/>
             </a:endParaRPr>
           </a:p>
         </p:txBody>
@@ -2571,20 +2121,8 @@
             <a:normAutofit/>
           </a:bodyPr>
           <a:p>
-            <a:pPr>
-              <a:lnSpc>
-                <a:spcPct val="90000"/>
-              </a:lnSpc>
-              <a:spcBef>
-                <a:spcPts val="1417"/>
-              </a:spcBef>
-              <a:buNone/>
-            </a:pPr>
-            <a:endParaRPr b="0" lang="en-US" sz="2100" spc="-1" strike="noStrike">
-              <a:solidFill>
-                <a:srgbClr val="000000"/>
-              </a:solidFill>
-              <a:latin typeface="Calibri"/>
+            <a:endParaRPr b="0" lang="en-US" sz="3200" spc="-1" strike="noStrike">
+              <a:latin typeface="Arial"/>
             </a:endParaRPr>
           </a:p>
         </p:txBody>
@@ -2617,20 +2155,8 @@
             <a:normAutofit/>
           </a:bodyPr>
           <a:p>
-            <a:pPr>
-              <a:lnSpc>
-                <a:spcPct val="90000"/>
-              </a:lnSpc>
-              <a:spcBef>
-                <a:spcPts val="1417"/>
-              </a:spcBef>
-              <a:buNone/>
-            </a:pPr>
-            <a:endParaRPr b="0" lang="en-US" sz="2100" spc="-1" strike="noStrike">
-              <a:solidFill>
-                <a:srgbClr val="000000"/>
-              </a:solidFill>
-              <a:latin typeface="Calibri"/>
+            <a:endParaRPr b="0" lang="en-US" sz="3200" spc="-1" strike="noStrike">
+              <a:latin typeface="Arial"/>
             </a:endParaRPr>
           </a:p>
         </p:txBody>
@@ -2663,20 +2189,8 @@
             <a:normAutofit/>
           </a:bodyPr>
           <a:p>
-            <a:pPr>
-              <a:lnSpc>
-                <a:spcPct val="90000"/>
-              </a:lnSpc>
-              <a:spcBef>
-                <a:spcPts val="1417"/>
-              </a:spcBef>
-              <a:buNone/>
-            </a:pPr>
-            <a:endParaRPr b="0" lang="en-US" sz="2100" spc="-1" strike="noStrike">
-              <a:solidFill>
-                <a:srgbClr val="000000"/>
-              </a:solidFill>
-              <a:latin typeface="Calibri"/>
+            <a:endParaRPr b="0" lang="en-US" sz="3200" spc="-1" strike="noStrike">
+              <a:latin typeface="Arial"/>
             </a:endParaRPr>
           </a:p>
         </p:txBody>
@@ -2688,7 +2202,7 @@
             <a:spLocks noGrp="1"/>
           </p:cNvSpPr>
           <p:nvPr>
-            <p:ph type="ftr" idx="2"/>
+            <p:ph type="ftr" idx="1"/>
           </p:nvPr>
         </p:nvSpPr>
         <p:spPr/>
@@ -2708,14 +2222,14 @@
             <a:spLocks noGrp="1"/>
           </p:cNvSpPr>
           <p:nvPr>
-            <p:ph type="sldNum" idx="3"/>
+            <p:ph type="sldNum" idx="2"/>
           </p:nvPr>
         </p:nvSpPr>
         <p:spPr/>
         <p:txBody>
           <a:bodyPr/>
           <a:p>
-            <a:fld id="{738771D3-6C7A-4474-A581-7727E0724D97}" type="slidenum">
+            <a:fld id="{E8588821-808B-45B8-A3D9-C30F4E7E7598}" type="slidenum">
               <a:t>&lt;#&gt;</a:t>
             </a:fld>
           </a:p>
@@ -2728,7 +2242,7 @@
             <a:spLocks noGrp="1"/>
           </p:cNvSpPr>
           <p:nvPr>
-            <p:ph type="dt" idx="1"/>
+            <p:ph type="dt" idx="3"/>
           </p:nvPr>
         </p:nvSpPr>
         <p:spPr/>
@@ -2736,7 +2250,7 @@
           <a:bodyPr/>
           <a:p>
             <a:r>
-              <a:rPr lang="ru-RU"/>
+              <a:rPr lang="en-US"/>
               <a:t/>
             </a:r>
           </a:p>
@@ -2777,7 +2291,7 @@
         <p:spPr>
           <a:xfrm>
             <a:off x="1143000" y="841680"/>
-            <a:ext cx="6857640" cy="1790280"/>
+            <a:ext cx="6857280" cy="1789920"/>
           </a:xfrm>
           <a:prstGeom prst="rect">
             <a:avLst/>
@@ -2792,11 +2306,11 @@
             <a:noAutofit/>
           </a:bodyPr>
           <a:p>
-            <a:endParaRPr b="0" lang="en-US" sz="1800" spc="-1" strike="noStrike">
-              <a:solidFill>
-                <a:srgbClr val="000000"/>
-              </a:solidFill>
-              <a:latin typeface="Calibri"/>
+            <a:pPr algn="ctr">
+              <a:buNone/>
+            </a:pPr>
+            <a:endParaRPr b="0" lang="en-US" sz="4400" spc="-1" strike="noStrike">
+              <a:latin typeface="Arial"/>
             </a:endParaRPr>
           </a:p>
         </p:txBody>
@@ -2829,20 +2343,8 @@
             <a:normAutofit/>
           </a:bodyPr>
           <a:p>
-            <a:pPr>
-              <a:lnSpc>
-                <a:spcPct val="90000"/>
-              </a:lnSpc>
-              <a:spcBef>
-                <a:spcPts val="1417"/>
-              </a:spcBef>
-              <a:buNone/>
-            </a:pPr>
-            <a:endParaRPr b="0" lang="en-US" sz="2100" spc="-1" strike="noStrike">
-              <a:solidFill>
-                <a:srgbClr val="000000"/>
-              </a:solidFill>
-              <a:latin typeface="Calibri"/>
+            <a:endParaRPr b="0" lang="en-US" sz="3200" spc="-1" strike="noStrike">
+              <a:latin typeface="Arial"/>
             </a:endParaRPr>
           </a:p>
         </p:txBody>
@@ -2875,20 +2377,8 @@
             <a:normAutofit/>
           </a:bodyPr>
           <a:p>
-            <a:pPr>
-              <a:lnSpc>
-                <a:spcPct val="90000"/>
-              </a:lnSpc>
-              <a:spcBef>
-                <a:spcPts val="1417"/>
-              </a:spcBef>
-              <a:buNone/>
-            </a:pPr>
-            <a:endParaRPr b="0" lang="en-US" sz="2100" spc="-1" strike="noStrike">
-              <a:solidFill>
-                <a:srgbClr val="000000"/>
-              </a:solidFill>
-              <a:latin typeface="Calibri"/>
+            <a:endParaRPr b="0" lang="en-US" sz="3200" spc="-1" strike="noStrike">
+              <a:latin typeface="Arial"/>
             </a:endParaRPr>
           </a:p>
         </p:txBody>
@@ -2921,20 +2411,8 @@
             <a:normAutofit/>
           </a:bodyPr>
           <a:p>
-            <a:pPr>
-              <a:lnSpc>
-                <a:spcPct val="90000"/>
-              </a:lnSpc>
-              <a:spcBef>
-                <a:spcPts val="1417"/>
-              </a:spcBef>
-              <a:buNone/>
-            </a:pPr>
-            <a:endParaRPr b="0" lang="en-US" sz="2100" spc="-1" strike="noStrike">
-              <a:solidFill>
-                <a:srgbClr val="000000"/>
-              </a:solidFill>
-              <a:latin typeface="Calibri"/>
+            <a:endParaRPr b="0" lang="en-US" sz="3200" spc="-1" strike="noStrike">
+              <a:latin typeface="Arial"/>
             </a:endParaRPr>
           </a:p>
         </p:txBody>
@@ -2946,7 +2424,7 @@
             <a:spLocks noGrp="1"/>
           </p:cNvSpPr>
           <p:nvPr>
-            <p:ph type="ftr" idx="2"/>
+            <p:ph type="ftr" idx="1"/>
           </p:nvPr>
         </p:nvSpPr>
         <p:spPr/>
@@ -2966,14 +2444,14 @@
             <a:spLocks noGrp="1"/>
           </p:cNvSpPr>
           <p:nvPr>
-            <p:ph type="sldNum" idx="3"/>
+            <p:ph type="sldNum" idx="2"/>
           </p:nvPr>
         </p:nvSpPr>
         <p:spPr/>
         <p:txBody>
           <a:bodyPr/>
           <a:p>
-            <a:fld id="{4A6BB184-AE1A-42D7-B9FB-E35178DCAD4F}" type="slidenum">
+            <a:fld id="{86B14E52-2EB8-4FE3-8F84-DF7D9411D333}" type="slidenum">
               <a:t>&lt;#&gt;</a:t>
             </a:fld>
           </a:p>
@@ -2986,7 +2464,7 @@
             <a:spLocks noGrp="1"/>
           </p:cNvSpPr>
           <p:nvPr>
-            <p:ph type="dt" idx="1"/>
+            <p:ph type="dt" idx="3"/>
           </p:nvPr>
         </p:nvSpPr>
         <p:spPr/>
@@ -2994,7 +2472,7 @@
           <a:bodyPr/>
           <a:p>
             <a:r>
-              <a:rPr lang="ru-RU"/>
+              <a:rPr lang="en-US"/>
               <a:t/>
             </a:r>
           </a:p>
@@ -3035,7 +2513,7 @@
         <p:spPr>
           <a:xfrm>
             <a:off x="1143000" y="841680"/>
-            <a:ext cx="6857640" cy="1790280"/>
+            <a:ext cx="6857280" cy="1789920"/>
           </a:xfrm>
           <a:prstGeom prst="rect">
             <a:avLst/>
@@ -3050,11 +2528,11 @@
             <a:noAutofit/>
           </a:bodyPr>
           <a:p>
-            <a:endParaRPr b="0" lang="en-US" sz="1800" spc="-1" strike="noStrike">
-              <a:solidFill>
-                <a:srgbClr val="000000"/>
-              </a:solidFill>
-              <a:latin typeface="Calibri"/>
+            <a:pPr algn="ctr">
+              <a:buNone/>
+            </a:pPr>
+            <a:endParaRPr b="0" lang="en-US" sz="4400" spc="-1" strike="noStrike">
+              <a:latin typeface="Arial"/>
             </a:endParaRPr>
           </a:p>
         </p:txBody>
@@ -3087,20 +2565,8 @@
             <a:normAutofit/>
           </a:bodyPr>
           <a:p>
-            <a:pPr>
-              <a:lnSpc>
-                <a:spcPct val="90000"/>
-              </a:lnSpc>
-              <a:spcBef>
-                <a:spcPts val="1417"/>
-              </a:spcBef>
-              <a:buNone/>
-            </a:pPr>
-            <a:endParaRPr b="0" lang="en-US" sz="2100" spc="-1" strike="noStrike">
-              <a:solidFill>
-                <a:srgbClr val="000000"/>
-              </a:solidFill>
-              <a:latin typeface="Calibri"/>
+            <a:endParaRPr b="0" lang="en-US" sz="3200" spc="-1" strike="noStrike">
+              <a:latin typeface="Arial"/>
             </a:endParaRPr>
           </a:p>
         </p:txBody>
@@ -3133,20 +2599,8 @@
             <a:normAutofit/>
           </a:bodyPr>
           <a:p>
-            <a:pPr>
-              <a:lnSpc>
-                <a:spcPct val="90000"/>
-              </a:lnSpc>
-              <a:spcBef>
-                <a:spcPts val="1417"/>
-              </a:spcBef>
-              <a:buNone/>
-            </a:pPr>
-            <a:endParaRPr b="0" lang="en-US" sz="2100" spc="-1" strike="noStrike">
-              <a:solidFill>
-                <a:srgbClr val="000000"/>
-              </a:solidFill>
-              <a:latin typeface="Calibri"/>
+            <a:endParaRPr b="0" lang="en-US" sz="3200" spc="-1" strike="noStrike">
+              <a:latin typeface="Arial"/>
             </a:endParaRPr>
           </a:p>
         </p:txBody>
@@ -3179,20 +2633,8 @@
             <a:normAutofit/>
           </a:bodyPr>
           <a:p>
-            <a:pPr>
-              <a:lnSpc>
-                <a:spcPct val="90000"/>
-              </a:lnSpc>
-              <a:spcBef>
-                <a:spcPts val="1417"/>
-              </a:spcBef>
-              <a:buNone/>
-            </a:pPr>
-            <a:endParaRPr b="0" lang="en-US" sz="2100" spc="-1" strike="noStrike">
-              <a:solidFill>
-                <a:srgbClr val="000000"/>
-              </a:solidFill>
-              <a:latin typeface="Calibri"/>
+            <a:endParaRPr b="0" lang="en-US" sz="3200" spc="-1" strike="noStrike">
+              <a:latin typeface="Arial"/>
             </a:endParaRPr>
           </a:p>
         </p:txBody>
@@ -3204,7 +2646,7 @@
             <a:spLocks noGrp="1"/>
           </p:cNvSpPr>
           <p:nvPr>
-            <p:ph type="ftr" idx="2"/>
+            <p:ph type="ftr" idx="1"/>
           </p:nvPr>
         </p:nvSpPr>
         <p:spPr/>
@@ -3224,14 +2666,14 @@
             <a:spLocks noGrp="1"/>
           </p:cNvSpPr>
           <p:nvPr>
-            <p:ph type="sldNum" idx="3"/>
+            <p:ph type="sldNum" idx="2"/>
           </p:nvPr>
         </p:nvSpPr>
         <p:spPr/>
         <p:txBody>
           <a:bodyPr/>
           <a:p>
-            <a:fld id="{35F0A89A-4D72-47D3-B1DB-F355A5A6C26D}" type="slidenum">
+            <a:fld id="{377C4EBD-BCD1-40AF-AFE2-65FB98CC042D}" type="slidenum">
               <a:t>&lt;#&gt;</a:t>
             </a:fld>
           </a:p>
@@ -3244,7 +2686,7 @@
             <a:spLocks noGrp="1"/>
           </p:cNvSpPr>
           <p:nvPr>
-            <p:ph type="dt" idx="1"/>
+            <p:ph type="dt" idx="3"/>
           </p:nvPr>
         </p:nvSpPr>
         <p:spPr/>
@@ -3252,7 +2694,7 @@
           <a:bodyPr/>
           <a:p>
             <a:r>
-              <a:rPr lang="ru-RU"/>
+              <a:rPr lang="en-US"/>
               <a:t/>
             </a:r>
           </a:p>
@@ -3300,41 +2742,29 @@
         <p:spPr>
           <a:xfrm>
             <a:off x="1143000" y="841680"/>
-            <a:ext cx="6857640" cy="1790280"/>
-          </a:xfrm>
-          <a:prstGeom prst="rect">
-            <a:avLst/>
-          </a:prstGeom>
-          <a:noFill/>
-          <a:ln w="0">
-            <a:noFill/>
-          </a:ln>
-        </p:spPr>
-        <p:txBody>
-          <a:bodyPr anchor="b">
+            <a:ext cx="6857280" cy="1789920"/>
+          </a:xfrm>
+          <a:prstGeom prst="rect">
+            <a:avLst/>
+          </a:prstGeom>
+          <a:noFill/>
+          <a:ln w="0">
+            <a:noFill/>
+          </a:ln>
+        </p:spPr>
+        <p:txBody>
+          <a:bodyPr lIns="0" rIns="0" tIns="0" bIns="0" anchor="ctr">
             <a:noAutofit/>
           </a:bodyPr>
           <a:p>
-            <a:pPr algn="ctr">
-              <a:lnSpc>
-                <a:spcPct val="90000"/>
-              </a:lnSpc>
-              <a:buNone/>
-            </a:pPr>
-            <a:r>
-              <a:rPr b="0" lang="ru-RU" sz="4500" spc="-1" strike="noStrike">
-                <a:solidFill>
-                  <a:srgbClr val="000000"/>
-                </a:solidFill>
-                <a:latin typeface="Calibri Light"/>
+            <a:r>
+              <a:rPr b="0" lang="en-US" sz="1800" spc="-1" strike="noStrike">
+                <a:latin typeface="Arial"/>
               </a:rPr>
-              <a:t>Образец заголовка</a:t>
-            </a:r>
-            <a:endParaRPr b="0" lang="en-US" sz="4500" spc="-1" strike="noStrike">
-              <a:solidFill>
-                <a:srgbClr val="000000"/>
-              </a:solidFill>
-              <a:latin typeface="Calibri"/>
+              <a:t>Click to edit the title text format</a:t>
+            </a:r>
+            <a:endParaRPr b="0" lang="en-US" sz="1800" spc="-1" strike="noStrike">
+              <a:latin typeface="Arial"/>
             </a:endParaRPr>
           </a:p>
         </p:txBody>
@@ -3346,91 +2776,31 @@
             <a:spLocks noGrp="1"/>
           </p:cNvSpPr>
           <p:nvPr>
-            <p:ph type="dt" idx="1"/>
-          </p:nvPr>
-        </p:nvSpPr>
-        <p:spPr>
-          <a:xfrm>
-            <a:off x="628560" y="4767120"/>
-            <a:ext cx="2057040" cy="273600"/>
-          </a:xfrm>
-          <a:prstGeom prst="rect">
-            <a:avLst/>
-          </a:prstGeom>
-          <a:noFill/>
-          <a:ln w="0">
-            <a:noFill/>
-          </a:ln>
-        </p:spPr>
-        <p:txBody>
-          <a:bodyPr anchor="ctr">
+            <p:ph type="ftr" idx="1"/>
+          </p:nvPr>
+        </p:nvSpPr>
+        <p:spPr>
+          <a:xfrm>
+            <a:off x="3029040" y="4767120"/>
+            <a:ext cx="3085560" cy="273240"/>
+          </a:xfrm>
+          <a:prstGeom prst="rect">
+            <a:avLst/>
+          </a:prstGeom>
+          <a:noFill/>
+          <a:ln w="0">
+            <a:noFill/>
+          </a:ln>
+        </p:spPr>
+        <p:txBody>
+          <a:bodyPr lIns="90000" rIns="90000" tIns="45000" bIns="45000" anchor="ctr">
             <a:noAutofit/>
           </a:bodyPr>
           <a:lstStyle>
-            <a:lvl1pPr>
+            <a:lvl1pPr algn="ctr">
               <a:lnSpc>
                 <a:spcPct val="100000"/>
               </a:lnSpc>
-              <a:buNone/>
-              <a:defRPr b="0" lang="en-US" sz="900" spc="-1" strike="noStrike">
-                <a:solidFill>
-                  <a:srgbClr val="8b8b8b"/>
-                </a:solidFill>
-                <a:latin typeface="Calibri"/>
-              </a:defRPr>
-            </a:lvl1pPr>
-          </a:lstStyle>
-          <a:p>
-            <a:pPr>
-              <a:lnSpc>
-                <a:spcPct val="100000"/>
-              </a:lnSpc>
-              <a:buNone/>
-            </a:pPr>
-            <a:r>
-              <a:rPr b="0" lang="en-US" sz="900" spc="-1" strike="noStrike">
-                <a:solidFill>
-                  <a:srgbClr val="8b8b8b"/>
-                </a:solidFill>
-                <a:latin typeface="Calibri"/>
-              </a:rPr>
-              <a:t>&lt;дата/время&gt;</a:t>
-            </a:r>
-            <a:endParaRPr b="0" lang="ru-RU" sz="900" spc="-1" strike="noStrike">
-              <a:latin typeface="Times New Roman"/>
-            </a:endParaRPr>
-          </a:p>
-        </p:txBody>
-      </p:sp>
-      <p:sp>
-        <p:nvSpPr>
-          <p:cNvPr id="2" name="PlaceHolder 3"/>
-          <p:cNvSpPr>
-            <a:spLocks noGrp="1"/>
-          </p:cNvSpPr>
-          <p:nvPr>
-            <p:ph type="ftr" idx="2"/>
-          </p:nvPr>
-        </p:nvSpPr>
-        <p:spPr>
-          <a:xfrm>
-            <a:off x="3029040" y="4767120"/>
-            <a:ext cx="3085920" cy="273600"/>
-          </a:xfrm>
-          <a:prstGeom prst="rect">
-            <a:avLst/>
-          </a:prstGeom>
-          <a:noFill/>
-          <a:ln w="0">
-            <a:noFill/>
-          </a:ln>
-        </p:spPr>
-        <p:txBody>
-          <a:bodyPr anchor="ctr">
-            <a:noAutofit/>
-          </a:bodyPr>
-          <a:lstStyle>
-            <a:lvl1pPr algn="ctr">
               <a:buNone/>
               <a:defRPr b="0" lang="ru-RU" sz="1400" spc="-1" strike="noStrike">
                 <a:latin typeface="Times New Roman"/>
@@ -3439,15 +2809,18 @@
           </a:lstStyle>
           <a:p>
             <a:pPr algn="ctr">
+              <a:lnSpc>
+                <a:spcPct val="100000"/>
+              </a:lnSpc>
               <a:buNone/>
             </a:pPr>
             <a:r>
               <a:rPr b="0" lang="ru-RU" sz="1400" spc="-1" strike="noStrike">
                 <a:latin typeface="Times New Roman"/>
               </a:rPr>
-              <a:t>&lt;нижний колонтитул&gt;</a:t>
-            </a:r>
-            <a:endParaRPr b="0" lang="ru-RU" sz="1400" spc="-1" strike="noStrike">
+              <a:t>&lt;footer&gt;</a:t>
+            </a:r>
+            <a:endParaRPr b="0" lang="en-US" sz="1400" spc="-1" strike="noStrike">
               <a:latin typeface="Times New Roman"/>
             </a:endParaRPr>
           </a:p>
@@ -3455,29 +2828,29 @@
       </p:sp>
       <p:sp>
         <p:nvSpPr>
-          <p:cNvPr id="3" name="PlaceHolder 4"/>
-          <p:cNvSpPr>
-            <a:spLocks noGrp="1"/>
-          </p:cNvSpPr>
-          <p:nvPr>
-            <p:ph type="sldNum" idx="3"/>
+          <p:cNvPr id="2" name="PlaceHolder 3"/>
+          <p:cNvSpPr>
+            <a:spLocks noGrp="1"/>
+          </p:cNvSpPr>
+          <p:nvPr>
+            <p:ph type="sldNum" idx="2"/>
           </p:nvPr>
         </p:nvSpPr>
         <p:spPr>
           <a:xfrm>
             <a:off x="6458040" y="4767120"/>
-            <a:ext cx="2057040" cy="273600"/>
-          </a:xfrm>
-          <a:prstGeom prst="rect">
-            <a:avLst/>
-          </a:prstGeom>
-          <a:noFill/>
-          <a:ln w="0">
-            <a:noFill/>
-          </a:ln>
-        </p:spPr>
-        <p:txBody>
-          <a:bodyPr anchor="ctr">
+            <a:ext cx="2056680" cy="273240"/>
+          </a:xfrm>
+          <a:prstGeom prst="rect">
+            <a:avLst/>
+          </a:prstGeom>
+          <a:noFill/>
+          <a:ln w="0">
+            <a:noFill/>
+          </a:ln>
+        </p:spPr>
+        <p:txBody>
+          <a:bodyPr lIns="90000" rIns="90000" tIns="45000" bIns="45000" anchor="ctr">
             <a:noAutofit/>
           </a:bodyPr>
           <a:lstStyle>
@@ -3501,16 +2874,63 @@
               </a:lnSpc>
               <a:buNone/>
             </a:pPr>
-            <a:fld id="{DD3CF8AD-C197-49B6-9AEF-A06436324541}" type="slidenum">
+            <a:fld id="{6CFF6824-7599-41A4-9CE1-BEEEE2C0D184}" type="slidenum">
               <a:rPr b="0" lang="en-US" sz="900" spc="-1" strike="noStrike">
                 <a:solidFill>
                   <a:srgbClr val="8b8b8b"/>
                 </a:solidFill>
                 <a:latin typeface="Calibri"/>
               </a:rPr>
-              <a:t>&lt;номер&gt;</a:t>
+              <a:t>&lt;number&gt;</a:t>
             </a:fld>
-            <a:endParaRPr b="0" lang="ru-RU" sz="900" spc="-1" strike="noStrike">
+            <a:endParaRPr b="0" lang="en-US" sz="900" spc="-1" strike="noStrike">
+              <a:latin typeface="Times New Roman"/>
+            </a:endParaRPr>
+          </a:p>
+        </p:txBody>
+      </p:sp>
+      <p:sp>
+        <p:nvSpPr>
+          <p:cNvPr id="3" name="PlaceHolder 4"/>
+          <p:cNvSpPr>
+            <a:spLocks noGrp="1"/>
+          </p:cNvSpPr>
+          <p:nvPr>
+            <p:ph type="dt" idx="3"/>
+          </p:nvPr>
+        </p:nvSpPr>
+        <p:spPr>
+          <a:xfrm>
+            <a:off x="628560" y="4767120"/>
+            <a:ext cx="2056680" cy="273240"/>
+          </a:xfrm>
+          <a:prstGeom prst="rect">
+            <a:avLst/>
+          </a:prstGeom>
+          <a:noFill/>
+          <a:ln w="0">
+            <a:noFill/>
+          </a:ln>
+        </p:spPr>
+        <p:txBody>
+          <a:bodyPr lIns="90000" rIns="90000" tIns="45000" bIns="45000" anchor="ctr">
+            <a:noAutofit/>
+          </a:bodyPr>
+          <a:lstStyle>
+            <a:lvl1pPr>
+              <a:defRPr b="0" lang="en-US" sz="1400" spc="-1" strike="noStrike">
+                <a:latin typeface="Times New Roman"/>
+              </a:defRPr>
+            </a:lvl1pPr>
+          </a:lstStyle>
+          <a:p>
+            <a:r>
+              <a:rPr b="0" lang="en-US" sz="1400" spc="-1" strike="noStrike">
+                <a:latin typeface="Times New Roman"/>
+              </a:rPr>
+              <a:t>&lt;date/time&gt;</a:t>
+            </a:r>
+            <a:endParaRPr b="0" lang="en-US" sz="1400" spc="-1" strike="noStrike">
               <a:latin typeface="Times New Roman"/>
             </a:endParaRPr>
           </a:p>
@@ -3545,9 +2965,6 @@
           </a:bodyPr>
           <a:p>
             <a:pPr marL="432000" indent="-324000">
-              <a:lnSpc>
-                <a:spcPct val="90000"/>
-              </a:lnSpc>
               <a:spcBef>
                 <a:spcPts val="1417"/>
               </a:spcBef>
@@ -3559,26 +2976,17 @@
               <a:buChar char=""/>
             </a:pPr>
             <a:r>
-              <a:rPr b="0" lang="en-US" sz="2100" spc="-1" strike="noStrike">
-                <a:solidFill>
-                  <a:srgbClr val="000000"/>
-                </a:solidFill>
-                <a:latin typeface="Calibri"/>
+              <a:rPr b="0" lang="en-US" sz="3200" spc="-1" strike="noStrike">
+                <a:latin typeface="Arial"/>
               </a:rPr>
-              <a:t>Для правки структуры щёлкните мышью</a:t>
-            </a:r>
-            <a:endParaRPr b="0" lang="en-US" sz="2100" spc="-1" strike="noStrike">
-              <a:solidFill>
-                <a:srgbClr val="000000"/>
-              </a:solidFill>
-              <a:latin typeface="Calibri"/>
+              <a:t>Click to edit the outline text format</a:t>
+            </a:r>
+            <a:endParaRPr b="0" lang="en-US" sz="3200" spc="-1" strike="noStrike">
+              <a:latin typeface="Arial"/>
             </a:endParaRPr>
           </a:p>
           <a:p>
             <a:pPr lvl="1" marL="864000" indent="-324000">
-              <a:lnSpc>
-                <a:spcPct val="90000"/>
-              </a:lnSpc>
               <a:spcBef>
                 <a:spcPts val="1134"/>
               </a:spcBef>
@@ -3590,26 +2998,17 @@
               <a:buChar char=""/>
             </a:pPr>
             <a:r>
-              <a:rPr b="0" lang="en-US" sz="1500" spc="-1" strike="noStrike">
-                <a:solidFill>
-                  <a:srgbClr val="000000"/>
-                </a:solidFill>
-                <a:latin typeface="Calibri"/>
+              <a:rPr b="0" lang="en-US" sz="2800" spc="-1" strike="noStrike">
+                <a:latin typeface="Arial"/>
               </a:rPr>
-              <a:t>Второй уровень структуры</a:t>
-            </a:r>
-            <a:endParaRPr b="0" lang="en-US" sz="1500" spc="-1" strike="noStrike">
-              <a:solidFill>
-                <a:srgbClr val="000000"/>
-              </a:solidFill>
-              <a:latin typeface="Calibri"/>
+              <a:t>Second Outline Level</a:t>
+            </a:r>
+            <a:endParaRPr b="0" lang="en-US" sz="2800" spc="-1" strike="noStrike">
+              <a:latin typeface="Arial"/>
             </a:endParaRPr>
           </a:p>
           <a:p>
             <a:pPr lvl="2" marL="1296000" indent="-288000">
-              <a:lnSpc>
-                <a:spcPct val="90000"/>
-              </a:lnSpc>
               <a:spcBef>
                 <a:spcPts val="850"/>
               </a:spcBef>
@@ -3621,26 +3020,17 @@
               <a:buChar char=""/>
             </a:pPr>
             <a:r>
-              <a:rPr b="0" lang="en-US" sz="1350" spc="-1" strike="noStrike">
-                <a:solidFill>
-                  <a:srgbClr val="000000"/>
-                </a:solidFill>
-                <a:latin typeface="Calibri"/>
+              <a:rPr b="0" lang="en-US" sz="2400" spc="-1" strike="noStrike">
+                <a:latin typeface="Arial"/>
               </a:rPr>
-              <a:t>Третий уровень структуры</a:t>
-            </a:r>
-            <a:endParaRPr b="0" lang="en-US" sz="1350" spc="-1" strike="noStrike">
-              <a:solidFill>
-                <a:srgbClr val="000000"/>
-              </a:solidFill>
-              <a:latin typeface="Calibri"/>
+              <a:t>Third Outline Level</a:t>
+            </a:r>
+            <a:endParaRPr b="0" lang="en-US" sz="2400" spc="-1" strike="noStrike">
+              <a:latin typeface="Arial"/>
             </a:endParaRPr>
           </a:p>
           <a:p>
             <a:pPr lvl="3" marL="1728000" indent="-216000">
-              <a:lnSpc>
-                <a:spcPct val="90000"/>
-              </a:lnSpc>
               <a:spcBef>
                 <a:spcPts val="567"/>
               </a:spcBef>
@@ -3652,26 +3042,17 @@
               <a:buChar char=""/>
             </a:pPr>
             <a:r>
-              <a:rPr b="0" lang="en-US" sz="1350" spc="-1" strike="noStrike">
-                <a:solidFill>
-                  <a:srgbClr val="000000"/>
-                </a:solidFill>
-                <a:latin typeface="Calibri"/>
+              <a:rPr b="0" lang="en-US" sz="2000" spc="-1" strike="noStrike">
+                <a:latin typeface="Arial"/>
               </a:rPr>
-              <a:t>Четвёртый уровень структуры</a:t>
-            </a:r>
-            <a:endParaRPr b="0" lang="en-US" sz="1350" spc="-1" strike="noStrike">
-              <a:solidFill>
-                <a:srgbClr val="000000"/>
-              </a:solidFill>
-              <a:latin typeface="Calibri"/>
+              <a:t>Fourth Outline Level</a:t>
+            </a:r>
+            <a:endParaRPr b="0" lang="en-US" sz="2000" spc="-1" strike="noStrike">
+              <a:latin typeface="Arial"/>
             </a:endParaRPr>
           </a:p>
           <a:p>
             <a:pPr lvl="4" marL="2160000" indent="-216000">
-              <a:lnSpc>
-                <a:spcPct val="90000"/>
-              </a:lnSpc>
               <a:spcBef>
                 <a:spcPts val="283"/>
               </a:spcBef>
@@ -3684,25 +3065,16 @@
             </a:pPr>
             <a:r>
               <a:rPr b="0" lang="en-US" sz="2000" spc="-1" strike="noStrike">
-                <a:solidFill>
-                  <a:srgbClr val="000000"/>
-                </a:solidFill>
-                <a:latin typeface="Calibri"/>
+                <a:latin typeface="Arial"/>
               </a:rPr>
-              <a:t>Пятый уровень структуры</a:t>
+              <a:t>Fifth Outline Level</a:t>
             </a:r>
             <a:endParaRPr b="0" lang="en-US" sz="2000" spc="-1" strike="noStrike">
-              <a:solidFill>
-                <a:srgbClr val="000000"/>
-              </a:solidFill>
-              <a:latin typeface="Calibri"/>
+              <a:latin typeface="Arial"/>
             </a:endParaRPr>
           </a:p>
           <a:p>
             <a:pPr lvl="5" marL="2592000" indent="-216000">
-              <a:lnSpc>
-                <a:spcPct val="90000"/>
-              </a:lnSpc>
               <a:spcBef>
                 <a:spcPts val="283"/>
               </a:spcBef>
@@ -3715,25 +3087,16 @@
             </a:pPr>
             <a:r>
               <a:rPr b="0" lang="en-US" sz="2000" spc="-1" strike="noStrike">
-                <a:solidFill>
-                  <a:srgbClr val="000000"/>
-                </a:solidFill>
-                <a:latin typeface="Calibri"/>
+                <a:latin typeface="Arial"/>
               </a:rPr>
-              <a:t>Шестой уровень структуры</a:t>
+              <a:t>Sixth Outline Level</a:t>
             </a:r>
             <a:endParaRPr b="0" lang="en-US" sz="2000" spc="-1" strike="noStrike">
-              <a:solidFill>
-                <a:srgbClr val="000000"/>
-              </a:solidFill>
-              <a:latin typeface="Calibri"/>
+              <a:latin typeface="Arial"/>
             </a:endParaRPr>
           </a:p>
           <a:p>
             <a:pPr lvl="6" marL="3024000" indent="-216000">
-              <a:lnSpc>
-                <a:spcPct val="90000"/>
-              </a:lnSpc>
               <a:spcBef>
                 <a:spcPts val="283"/>
               </a:spcBef>
@@ -3746,18 +3109,12 @@
             </a:pPr>
             <a:r>
               <a:rPr b="0" lang="en-US" sz="2000" spc="-1" strike="noStrike">
-                <a:solidFill>
-                  <a:srgbClr val="000000"/>
-                </a:solidFill>
-                <a:latin typeface="Calibri"/>
+                <a:latin typeface="Arial"/>
               </a:rPr>
-              <a:t>Седьмой уровень структуры</a:t>
+              <a:t>Seventh Outline Level</a:t>
             </a:r>
             <a:endParaRPr b="0" lang="en-US" sz="2000" spc="-1" strike="noStrike">
-              <a:solidFill>
-                <a:srgbClr val="000000"/>
-              </a:solidFill>
-              <a:latin typeface="Calibri"/>
+              <a:latin typeface="Arial"/>
             </a:endParaRPr>
           </a:p>
         </p:txBody>
@@ -3815,7 +3172,7 @@
         <p:spPr>
           <a:xfrm>
             <a:off x="186840" y="185400"/>
-            <a:ext cx="8770320" cy="4758120"/>
+            <a:ext cx="8769960" cy="4757760"/>
           </a:xfrm>
           <a:prstGeom prst="roundRect">
             <a:avLst>
@@ -3853,7 +3210,7 @@
         <p:spPr>
           <a:xfrm>
             <a:off x="460080" y="658080"/>
-            <a:ext cx="8469000" cy="3306960"/>
+            <a:ext cx="8468640" cy="3306600"/>
           </a:xfrm>
           <a:prstGeom prst="rect">
             <a:avLst/>
@@ -3890,58 +3247,7 @@
               </a:rPr>
               <a:t>TITLE</a:t>
             </a:r>
-            <a:endParaRPr b="0" lang="ru-RU" sz="5400" spc="-1" strike="noStrike">
-              <a:latin typeface="Arial"/>
-            </a:endParaRPr>
-          </a:p>
-        </p:txBody>
-      </p:sp>
-      <p:sp>
-        <p:nvSpPr>
-          <p:cNvPr id="49" name="Прямоугольник 5"/>
-          <p:cNvSpPr/>
-          <p:nvPr/>
-        </p:nvSpPr>
-        <p:spPr>
-          <a:xfrm>
-            <a:off x="460080" y="358920"/>
-            <a:ext cx="2999160" cy="269640"/>
-          </a:xfrm>
-          <a:prstGeom prst="rect">
-            <a:avLst/>
-          </a:prstGeom>
-          <a:noFill/>
-          <a:ln w="0">
-            <a:noFill/>
-          </a:ln>
-        </p:spPr>
-        <p:style>
-          <a:lnRef idx="0"/>
-          <a:fillRef idx="0"/>
-          <a:effectRef idx="0"/>
-          <a:fontRef idx="minor"/>
-        </p:style>
-        <p:txBody>
-          <a:bodyPr lIns="90000" rIns="90000" tIns="45000" bIns="45000" anchor="t">
-            <a:noAutofit/>
-          </a:bodyPr>
-          <a:p>
-            <a:pPr>
-              <a:lnSpc>
-                <a:spcPts val="1650"/>
-              </a:lnSpc>
-              <a:buNone/>
-            </a:pPr>
-            <a:r>
-              <a:rPr b="0" lang="ru-RU" sz="1400" spc="-1" strike="noStrike">
-                <a:solidFill>
-                  <a:srgbClr val="f2f2f2"/>
-                </a:solidFill>
-                <a:latin typeface="Arial"/>
-              </a:rPr>
-              <a:t>Тема:</a:t>
-            </a:r>
-            <a:endParaRPr b="0" lang="ru-RU" sz="1400" spc="-1" strike="noStrike">
+            <a:endParaRPr b="0" lang="en-US" sz="5400" spc="-1" strike="noStrike">
               <a:latin typeface="Arial"/>
             </a:endParaRPr>
           </a:p>
@@ -3986,14 +3292,14 @@
       </p:grpSpPr>
       <p:sp>
         <p:nvSpPr>
-          <p:cNvPr id="50" name="Прямоугольник со скругленными углами 3"/>
+          <p:cNvPr id="49" name="Прямоугольник со скругленными углами 3"/>
           <p:cNvSpPr/>
           <p:nvPr/>
         </p:nvSpPr>
         <p:spPr>
           <a:xfrm>
             <a:off x="3507480" y="0"/>
-            <a:ext cx="5636160" cy="5143320"/>
+            <a:ext cx="5635800" cy="5142960"/>
           </a:xfrm>
           <a:prstGeom prst="roundRect">
             <a:avLst>
@@ -4042,22 +3348,22 @@
               </a:rPr>
               <a:t>PIC</a:t>
             </a:r>
-            <a:endParaRPr b="0" lang="ru-RU" sz="1800" spc="-1" strike="noStrike">
-              <a:latin typeface="Arial"/>
-            </a:endParaRPr>
-          </a:p>
-        </p:txBody>
-      </p:sp>
-      <p:sp>
-        <p:nvSpPr>
-          <p:cNvPr id="51" name="Прямоугольник: скругленные углы 2"/>
+            <a:endParaRPr b="0" lang="en-US" sz="1800" spc="-1" strike="noStrike">
+              <a:latin typeface="Arial"/>
+            </a:endParaRPr>
+          </a:p>
+        </p:txBody>
+      </p:sp>
+      <p:sp>
+        <p:nvSpPr>
+          <p:cNvPr id="50" name="Прямоугольник: скругленные углы 2"/>
           <p:cNvSpPr/>
           <p:nvPr/>
         </p:nvSpPr>
         <p:spPr>
           <a:xfrm>
             <a:off x="3722040" y="257040"/>
-            <a:ext cx="5186160" cy="4650120"/>
+            <a:ext cx="5185800" cy="4649760"/>
           </a:xfrm>
           <a:prstGeom prst="roundRect">
             <a:avLst>
@@ -4091,14 +3397,14 @@
       </p:sp>
       <p:sp>
         <p:nvSpPr>
-          <p:cNvPr id="52" name="Овал 1"/>
+          <p:cNvPr id="51" name="Овал 1"/>
           <p:cNvSpPr/>
           <p:nvPr/>
         </p:nvSpPr>
         <p:spPr>
           <a:xfrm>
             <a:off x="4122000" y="631080"/>
-            <a:ext cx="899640" cy="899640"/>
+            <a:ext cx="899280" cy="899280"/>
           </a:xfrm>
           <a:prstGeom prst="ellipse">
             <a:avLst/>
@@ -4141,25 +3447,26 @@
                   <a:srgbClr val="ffffff"/>
                 </a:solidFill>
                 <a:latin typeface="Calibri"/>
+                <a:ea typeface="DejaVu Sans"/>
               </a:rPr>
               <a:t>01</a:t>
             </a:r>
-            <a:endParaRPr b="0" lang="ru-RU" sz="1800" spc="-1" strike="noStrike">
-              <a:latin typeface="Arial"/>
-            </a:endParaRPr>
-          </a:p>
-        </p:txBody>
-      </p:sp>
-      <p:sp>
-        <p:nvSpPr>
-          <p:cNvPr id="53" name="Овал 23"/>
+            <a:endParaRPr b="0" lang="en-US" sz="1800" spc="-1" strike="noStrike">
+              <a:latin typeface="Arial"/>
+            </a:endParaRPr>
+          </a:p>
+        </p:txBody>
+      </p:sp>
+      <p:sp>
+        <p:nvSpPr>
+          <p:cNvPr id="52" name="Овал 23"/>
           <p:cNvSpPr/>
           <p:nvPr/>
         </p:nvSpPr>
         <p:spPr>
           <a:xfrm>
             <a:off x="4122000" y="2127600"/>
-            <a:ext cx="899640" cy="887760"/>
+            <a:ext cx="899280" cy="887400"/>
           </a:xfrm>
           <a:prstGeom prst="ellipse">
             <a:avLst/>
@@ -4202,25 +3509,26 @@
                   <a:srgbClr val="ffffff"/>
                 </a:solidFill>
                 <a:latin typeface="Calibri"/>
+                <a:ea typeface="DejaVu Sans"/>
               </a:rPr>
               <a:t>02</a:t>
             </a:r>
-            <a:endParaRPr b="0" lang="ru-RU" sz="1800" spc="-1" strike="noStrike">
-              <a:latin typeface="Arial"/>
-            </a:endParaRPr>
-          </a:p>
-        </p:txBody>
-      </p:sp>
-      <p:sp>
-        <p:nvSpPr>
-          <p:cNvPr id="54" name="Овал 29"/>
+            <a:endParaRPr b="0" lang="en-US" sz="1800" spc="-1" strike="noStrike">
+              <a:latin typeface="Arial"/>
+            </a:endParaRPr>
+          </a:p>
+        </p:txBody>
+      </p:sp>
+      <p:sp>
+        <p:nvSpPr>
+          <p:cNvPr id="53" name="Овал 29"/>
           <p:cNvSpPr/>
           <p:nvPr/>
         </p:nvSpPr>
         <p:spPr>
           <a:xfrm>
             <a:off x="4122000" y="3612240"/>
-            <a:ext cx="899640" cy="899640"/>
+            <a:ext cx="899280" cy="899280"/>
           </a:xfrm>
           <a:prstGeom prst="ellipse">
             <a:avLst/>
@@ -4263,25 +3571,26 @@
                   <a:srgbClr val="ffffff"/>
                 </a:solidFill>
                 <a:latin typeface="Calibri"/>
+                <a:ea typeface="DejaVu Sans"/>
               </a:rPr>
               <a:t>03</a:t>
             </a:r>
-            <a:endParaRPr b="0" lang="ru-RU" sz="1800" spc="-1" strike="noStrike">
-              <a:latin typeface="Arial"/>
-            </a:endParaRPr>
-          </a:p>
-        </p:txBody>
-      </p:sp>
-      <p:sp>
-        <p:nvSpPr>
-          <p:cNvPr id="55" name="TextBox 10"/>
+            <a:endParaRPr b="0" lang="en-US" sz="1800" spc="-1" strike="noStrike">
+              <a:latin typeface="Arial"/>
+            </a:endParaRPr>
+          </a:p>
+        </p:txBody>
+      </p:sp>
+      <p:sp>
+        <p:nvSpPr>
+          <p:cNvPr id="54" name="TextBox 10"/>
           <p:cNvSpPr/>
           <p:nvPr/>
         </p:nvSpPr>
         <p:spPr>
           <a:xfrm>
             <a:off x="5110920" y="489600"/>
-            <a:ext cx="3579120" cy="550800"/>
+            <a:ext cx="3578760" cy="550440"/>
           </a:xfrm>
           <a:prstGeom prst="rect">
             <a:avLst/>
@@ -4328,22 +3637,22 @@
               </a:rPr>
               <a:t>1</a:t>
             </a:r>
-            <a:endParaRPr b="0" lang="ru-RU" sz="1400" spc="-1" strike="noStrike">
-              <a:latin typeface="Arial"/>
-            </a:endParaRPr>
-          </a:p>
-        </p:txBody>
-      </p:sp>
-      <p:sp>
-        <p:nvSpPr>
-          <p:cNvPr id="56" name="TextBox 10"/>
+            <a:endParaRPr b="0" lang="en-US" sz="1400" spc="-1" strike="noStrike">
+              <a:latin typeface="Arial"/>
+            </a:endParaRPr>
+          </a:p>
+        </p:txBody>
+      </p:sp>
+      <p:sp>
+        <p:nvSpPr>
+          <p:cNvPr id="55" name="TextBox 10"/>
           <p:cNvSpPr/>
           <p:nvPr/>
         </p:nvSpPr>
         <p:spPr>
           <a:xfrm>
             <a:off x="5110920" y="1025280"/>
-            <a:ext cx="3579120" cy="789840"/>
+            <a:ext cx="3578760" cy="789480"/>
           </a:xfrm>
           <a:prstGeom prst="rect">
             <a:avLst/>
@@ -4390,22 +3699,22 @@
               </a:rPr>
               <a:t>1</a:t>
             </a:r>
-            <a:endParaRPr b="0" lang="ru-RU" sz="1100" spc="-1" strike="noStrike">
-              <a:latin typeface="Arial"/>
-            </a:endParaRPr>
-          </a:p>
-        </p:txBody>
-      </p:sp>
-      <p:sp>
-        <p:nvSpPr>
-          <p:cNvPr id="57" name="TextBox 10"/>
+            <a:endParaRPr b="0" lang="en-US" sz="1100" spc="-1" strike="noStrike">
+              <a:latin typeface="Arial"/>
+            </a:endParaRPr>
+          </a:p>
+        </p:txBody>
+      </p:sp>
+      <p:sp>
+        <p:nvSpPr>
+          <p:cNvPr id="56" name="TextBox 10"/>
           <p:cNvSpPr/>
           <p:nvPr/>
         </p:nvSpPr>
         <p:spPr>
           <a:xfrm>
             <a:off x="5107320" y="1985400"/>
-            <a:ext cx="3579120" cy="550800"/>
+            <a:ext cx="3578760" cy="550440"/>
           </a:xfrm>
           <a:prstGeom prst="rect">
             <a:avLst/>
@@ -4442,22 +3751,22 @@
               </a:rPr>
               <a:t>SUBTITLE2</a:t>
             </a:r>
-            <a:endParaRPr b="0" lang="ru-RU" sz="1400" spc="-1" strike="noStrike">
-              <a:latin typeface="Arial"/>
-            </a:endParaRPr>
-          </a:p>
-        </p:txBody>
-      </p:sp>
-      <p:sp>
-        <p:nvSpPr>
-          <p:cNvPr id="58" name="TextBox 10"/>
+            <a:endParaRPr b="0" lang="en-US" sz="1400" spc="-1" strike="noStrike">
+              <a:latin typeface="Arial"/>
+            </a:endParaRPr>
+          </a:p>
+        </p:txBody>
+      </p:sp>
+      <p:sp>
+        <p:nvSpPr>
+          <p:cNvPr id="57" name="TextBox 10"/>
           <p:cNvSpPr/>
           <p:nvPr/>
         </p:nvSpPr>
         <p:spPr>
           <a:xfrm>
             <a:off x="5107320" y="2517840"/>
-            <a:ext cx="3579120" cy="843480"/>
+            <a:ext cx="3578760" cy="843120"/>
           </a:xfrm>
           <a:prstGeom prst="rect">
             <a:avLst/>
@@ -4504,22 +3813,22 @@
               </a:rPr>
               <a:t>2</a:t>
             </a:r>
-            <a:endParaRPr b="0" lang="ru-RU" sz="1100" spc="-1" strike="noStrike">
-              <a:latin typeface="Arial"/>
-            </a:endParaRPr>
-          </a:p>
-        </p:txBody>
-      </p:sp>
-      <p:sp>
-        <p:nvSpPr>
-          <p:cNvPr id="59" name="TextBox 10"/>
+            <a:endParaRPr b="0" lang="en-US" sz="1100" spc="-1" strike="noStrike">
+              <a:latin typeface="Arial"/>
+            </a:endParaRPr>
+          </a:p>
+        </p:txBody>
+      </p:sp>
+      <p:sp>
+        <p:nvSpPr>
+          <p:cNvPr id="58" name="TextBox 10"/>
           <p:cNvSpPr/>
           <p:nvPr/>
         </p:nvSpPr>
         <p:spPr>
           <a:xfrm>
             <a:off x="5107320" y="3470760"/>
-            <a:ext cx="3579120" cy="550800"/>
+            <a:ext cx="3578760" cy="550440"/>
           </a:xfrm>
           <a:prstGeom prst="rect">
             <a:avLst/>
@@ -4556,22 +3865,22 @@
               </a:rPr>
               <a:t>SUBTITLE3</a:t>
             </a:r>
-            <a:endParaRPr b="0" lang="ru-RU" sz="1400" spc="-1" strike="noStrike">
-              <a:latin typeface="Arial"/>
-            </a:endParaRPr>
-          </a:p>
-        </p:txBody>
-      </p:sp>
-      <p:sp>
-        <p:nvSpPr>
-          <p:cNvPr id="60" name="TextBox 10"/>
+            <a:endParaRPr b="0" lang="en-US" sz="1400" spc="-1" strike="noStrike">
+              <a:latin typeface="Arial"/>
+            </a:endParaRPr>
+          </a:p>
+        </p:txBody>
+      </p:sp>
+      <p:sp>
+        <p:nvSpPr>
+          <p:cNvPr id="59" name="TextBox 10"/>
           <p:cNvSpPr/>
           <p:nvPr/>
         </p:nvSpPr>
         <p:spPr>
           <a:xfrm>
             <a:off x="5107320" y="4003560"/>
-            <a:ext cx="3579120" cy="794880"/>
+            <a:ext cx="3578760" cy="794520"/>
           </a:xfrm>
           <a:prstGeom prst="rect">
             <a:avLst/>
@@ -4618,22 +3927,22 @@
               </a:rPr>
               <a:t>3</a:t>
             </a:r>
-            <a:endParaRPr b="0" lang="ru-RU" sz="1100" spc="-1" strike="noStrike">
-              <a:latin typeface="Arial"/>
-            </a:endParaRPr>
-          </a:p>
-        </p:txBody>
-      </p:sp>
-      <p:sp>
-        <p:nvSpPr>
-          <p:cNvPr id="61" name="TextBox 13"/>
+            <a:endParaRPr b="0" lang="en-US" sz="1100" spc="-1" strike="noStrike">
+              <a:latin typeface="Arial"/>
+            </a:endParaRPr>
+          </a:p>
+        </p:txBody>
+      </p:sp>
+      <p:sp>
+        <p:nvSpPr>
+          <p:cNvPr id="60" name="TextBox 13"/>
           <p:cNvSpPr/>
           <p:nvPr/>
         </p:nvSpPr>
         <p:spPr>
           <a:xfrm>
             <a:off x="165960" y="200880"/>
-            <a:ext cx="3148200" cy="1842120"/>
+            <a:ext cx="3147840" cy="1841760"/>
           </a:xfrm>
           <a:prstGeom prst="rect">
             <a:avLst/>
@@ -4666,10 +3975,11 @@
                   <a:srgbClr val="ffffff"/>
                 </a:solidFill>
                 <a:latin typeface="Arial"/>
+                <a:ea typeface="DejaVu Sans"/>
               </a:rPr>
               <a:t>TITLE</a:t>
             </a:r>
-            <a:endParaRPr b="0" lang="ru-RU" sz="2200" spc="-1" strike="noStrike">
+            <a:endParaRPr b="0" lang="en-US" sz="2200" spc="-1" strike="noStrike">
               <a:latin typeface="Arial"/>
             </a:endParaRPr>
           </a:p>
@@ -4714,14 +4024,14 @@
       </p:grpSpPr>
       <p:sp>
         <p:nvSpPr>
-          <p:cNvPr id="62" name="Прямоугольник со скругленными углами 3"/>
+          <p:cNvPr id="61" name="Прямоугольник со скругленными углами 3"/>
           <p:cNvSpPr/>
           <p:nvPr/>
         </p:nvSpPr>
         <p:spPr>
           <a:xfrm>
             <a:off x="0" y="0"/>
-            <a:ext cx="9143640" cy="1961640"/>
+            <a:ext cx="9143280" cy="1961280"/>
           </a:xfrm>
           <a:prstGeom prst="roundRect">
             <a:avLst>
@@ -4772,22 +4082,22 @@
               </a:rPr>
               <a:t>PIC</a:t>
             </a:r>
-            <a:endParaRPr b="0" lang="ru-RU" sz="1800" spc="-1" strike="noStrike">
-              <a:latin typeface="Arial"/>
-            </a:endParaRPr>
-          </a:p>
-        </p:txBody>
-      </p:sp>
-      <p:sp>
-        <p:nvSpPr>
-          <p:cNvPr id="63" name="TextBox 10"/>
+            <a:endParaRPr b="0" lang="en-US" sz="1800" spc="-1" strike="noStrike">
+              <a:latin typeface="Arial"/>
+            </a:endParaRPr>
+          </a:p>
+        </p:txBody>
+      </p:sp>
+      <p:sp>
+        <p:nvSpPr>
+          <p:cNvPr id="62" name="TextBox 10"/>
           <p:cNvSpPr/>
           <p:nvPr/>
         </p:nvSpPr>
         <p:spPr>
           <a:xfrm>
             <a:off x="384840" y="2571840"/>
-            <a:ext cx="2665080" cy="713880"/>
+            <a:ext cx="2664720" cy="713520"/>
           </a:xfrm>
           <a:prstGeom prst="rect">
             <a:avLst/>
@@ -4824,22 +4134,22 @@
               </a:rPr>
               <a:t>SUBTITLE1</a:t>
             </a:r>
-            <a:endParaRPr b="0" lang="ru-RU" sz="1400" spc="-1" strike="noStrike">
-              <a:latin typeface="Arial"/>
-            </a:endParaRPr>
-          </a:p>
-        </p:txBody>
-      </p:sp>
-      <p:sp>
-        <p:nvSpPr>
-          <p:cNvPr id="64" name="TextBox 10"/>
+            <a:endParaRPr b="0" lang="en-US" sz="1400" spc="-1" strike="noStrike">
+              <a:latin typeface="Arial"/>
+            </a:endParaRPr>
+          </a:p>
+        </p:txBody>
+      </p:sp>
+      <p:sp>
+        <p:nvSpPr>
+          <p:cNvPr id="63" name="TextBox 10"/>
           <p:cNvSpPr/>
           <p:nvPr/>
         </p:nvSpPr>
         <p:spPr>
           <a:xfrm>
             <a:off x="384840" y="3356280"/>
-            <a:ext cx="2665080" cy="1565280"/>
+            <a:ext cx="2664720" cy="1564920"/>
           </a:xfrm>
           <a:prstGeom prst="rect">
             <a:avLst/>
@@ -4886,22 +4196,22 @@
               </a:rPr>
               <a:t>1</a:t>
             </a:r>
-            <a:endParaRPr b="0" lang="ru-RU" sz="1100" spc="-1" strike="noStrike">
-              <a:latin typeface="Arial"/>
-            </a:endParaRPr>
-          </a:p>
-        </p:txBody>
-      </p:sp>
-      <p:sp>
-        <p:nvSpPr>
-          <p:cNvPr id="65" name="TextBox 10"/>
+            <a:endParaRPr b="0" lang="en-US" sz="1100" spc="-1" strike="noStrike">
+              <a:latin typeface="Arial"/>
+            </a:endParaRPr>
+          </a:p>
+        </p:txBody>
+      </p:sp>
+      <p:sp>
+        <p:nvSpPr>
+          <p:cNvPr id="64" name="TextBox 10"/>
           <p:cNvSpPr/>
           <p:nvPr/>
         </p:nvSpPr>
         <p:spPr>
           <a:xfrm>
             <a:off x="3239280" y="2571840"/>
-            <a:ext cx="2665080" cy="713880"/>
+            <a:ext cx="2664720" cy="713520"/>
           </a:xfrm>
           <a:prstGeom prst="rect">
             <a:avLst/>
@@ -4938,22 +4248,22 @@
               </a:rPr>
               <a:t>SUBTITLE2</a:t>
             </a:r>
-            <a:endParaRPr b="0" lang="ru-RU" sz="1400" spc="-1" strike="noStrike">
-              <a:latin typeface="Arial"/>
-            </a:endParaRPr>
-          </a:p>
-        </p:txBody>
-      </p:sp>
-      <p:sp>
-        <p:nvSpPr>
-          <p:cNvPr id="66" name="TextBox 10"/>
+            <a:endParaRPr b="0" lang="en-US" sz="1400" spc="-1" strike="noStrike">
+              <a:latin typeface="Arial"/>
+            </a:endParaRPr>
+          </a:p>
+        </p:txBody>
+      </p:sp>
+      <p:sp>
+        <p:nvSpPr>
+          <p:cNvPr id="65" name="TextBox 10"/>
           <p:cNvSpPr/>
           <p:nvPr/>
         </p:nvSpPr>
         <p:spPr>
           <a:xfrm>
             <a:off x="3239280" y="3356280"/>
-            <a:ext cx="2665080" cy="1565280"/>
+            <a:ext cx="2664720" cy="1564920"/>
           </a:xfrm>
           <a:prstGeom prst="rect">
             <a:avLst/>
@@ -5000,22 +4310,22 @@
               </a:rPr>
               <a:t>2</a:t>
             </a:r>
-            <a:endParaRPr b="0" lang="ru-RU" sz="1100" spc="-1" strike="noStrike">
-              <a:latin typeface="Arial"/>
-            </a:endParaRPr>
-          </a:p>
-        </p:txBody>
-      </p:sp>
-      <p:sp>
-        <p:nvSpPr>
-          <p:cNvPr id="67" name="TextBox 10"/>
+            <a:endParaRPr b="0" lang="en-US" sz="1100" spc="-1" strike="noStrike">
+              <a:latin typeface="Arial"/>
+            </a:endParaRPr>
+          </a:p>
+        </p:txBody>
+      </p:sp>
+      <p:sp>
+        <p:nvSpPr>
+          <p:cNvPr id="66" name="TextBox 10"/>
           <p:cNvSpPr/>
           <p:nvPr/>
         </p:nvSpPr>
         <p:spPr>
           <a:xfrm>
             <a:off x="6093720" y="2571840"/>
-            <a:ext cx="2665080" cy="713880"/>
+            <a:ext cx="2664720" cy="713520"/>
           </a:xfrm>
           <a:prstGeom prst="rect">
             <a:avLst/>
@@ -5052,22 +4362,22 @@
               </a:rPr>
               <a:t>SUBTITLE3</a:t>
             </a:r>
-            <a:endParaRPr b="0" lang="ru-RU" sz="1400" spc="-1" strike="noStrike">
-              <a:latin typeface="Arial"/>
-            </a:endParaRPr>
-          </a:p>
-        </p:txBody>
-      </p:sp>
-      <p:sp>
-        <p:nvSpPr>
-          <p:cNvPr id="68" name="TextBox 10"/>
+            <a:endParaRPr b="0" lang="en-US" sz="1400" spc="-1" strike="noStrike">
+              <a:latin typeface="Arial"/>
+            </a:endParaRPr>
+          </a:p>
+        </p:txBody>
+      </p:sp>
+      <p:sp>
+        <p:nvSpPr>
+          <p:cNvPr id="67" name="TextBox 10"/>
           <p:cNvSpPr/>
           <p:nvPr/>
         </p:nvSpPr>
         <p:spPr>
           <a:xfrm>
             <a:off x="6093720" y="3356280"/>
-            <a:ext cx="2665080" cy="1565280"/>
+            <a:ext cx="2664720" cy="1564920"/>
           </a:xfrm>
           <a:prstGeom prst="rect">
             <a:avLst/>
@@ -5114,22 +4424,22 @@
               </a:rPr>
               <a:t>3</a:t>
             </a:r>
-            <a:endParaRPr b="0" lang="ru-RU" sz="1100" spc="-1" strike="noStrike">
-              <a:latin typeface="Arial"/>
-            </a:endParaRPr>
-          </a:p>
-        </p:txBody>
-      </p:sp>
-      <p:sp>
-        <p:nvSpPr>
-          <p:cNvPr id="69" name="TextBox 9"/>
+            <a:endParaRPr b="0" lang="en-US" sz="1100" spc="-1" strike="noStrike">
+              <a:latin typeface="Arial"/>
+            </a:endParaRPr>
+          </a:p>
+        </p:txBody>
+      </p:sp>
+      <p:sp>
+        <p:nvSpPr>
+          <p:cNvPr id="68" name="TextBox 9"/>
           <p:cNvSpPr/>
           <p:nvPr/>
         </p:nvSpPr>
         <p:spPr>
           <a:xfrm>
             <a:off x="384840" y="2178000"/>
-            <a:ext cx="8465760" cy="480960"/>
+            <a:ext cx="8465400" cy="480600"/>
           </a:xfrm>
           <a:prstGeom prst="rect">
             <a:avLst/>
@@ -5162,10 +4472,11 @@
                   <a:srgbClr val="ffffff"/>
                 </a:solidFill>
                 <a:latin typeface="Arial"/>
+                <a:ea typeface="DejaVu Sans"/>
               </a:rPr>
               <a:t>TITLE</a:t>
             </a:r>
-            <a:endParaRPr b="0" lang="ru-RU" sz="2200" spc="-1" strike="noStrike">
+            <a:endParaRPr b="0" lang="en-US" sz="2200" spc="-1" strike="noStrike">
               <a:latin typeface="Arial"/>
             </a:endParaRPr>
           </a:p>
@@ -5210,14 +4521,14 @@
       </p:grpSpPr>
       <p:sp>
         <p:nvSpPr>
-          <p:cNvPr id="70" name="Прямоугольник со скругленными углами 3"/>
+          <p:cNvPr id="69" name="Прямоугольник со скругленными углами 3"/>
           <p:cNvSpPr/>
           <p:nvPr/>
         </p:nvSpPr>
         <p:spPr>
           <a:xfrm>
             <a:off x="186840" y="185400"/>
-            <a:ext cx="8770320" cy="4758120"/>
+            <a:ext cx="8769960" cy="4757760"/>
           </a:xfrm>
           <a:prstGeom prst="roundRect">
             <a:avLst>
@@ -5248,14 +4559,14 @@
       </p:sp>
       <p:sp>
         <p:nvSpPr>
-          <p:cNvPr id="71" name="Прямоугольник 10"/>
+          <p:cNvPr id="70" name="Прямоугольник 10"/>
           <p:cNvSpPr/>
           <p:nvPr/>
         </p:nvSpPr>
         <p:spPr>
           <a:xfrm>
             <a:off x="460080" y="658080"/>
-            <a:ext cx="8469000" cy="3306960"/>
+            <a:ext cx="8468640" cy="3306600"/>
           </a:xfrm>
           <a:prstGeom prst="rect">
             <a:avLst/>
@@ -5292,7 +4603,7 @@
               </a:rPr>
               <a:t>TITLE</a:t>
             </a:r>
-            <a:endParaRPr b="0" lang="ru-RU" sz="5400" spc="-1" strike="noStrike">
+            <a:endParaRPr b="0" lang="en-US" sz="5400" spc="-1" strike="noStrike">
               <a:latin typeface="Arial"/>
             </a:endParaRPr>
           </a:p>
